--- a/site/slides/Future.pptx
+++ b/site/slides/Future.pptx
@@ -185,1066 +185,46 @@
 </p:presentation>
 </file>
 
+<file path=ppt/revisionInfo.xml><?xml version="1.0" encoding="utf-8"?>
+<p1510:revInfo xmlns:a="http://schemas.openxmlformats.org/drawingml/2006/main" xmlns:r="http://schemas.openxmlformats.org/officeDocument/2006/relationships" xmlns:p1510="http://schemas.microsoft.com/office/powerpoint/2015/10/main">
+  <p1510:revLst>
+    <p1510:client id="{DE81E315-EDE1-42E7-A640-84CC0316B763}" v="8" dt="2026-04-13T07:00:41.458"/>
+  </p1510:revLst>
+</p1510:revInfo>
+</file>
+
 <file path=ppt/changesInfos/changesInfo1.xml><?xml version="1.0" encoding="utf-8"?>
 <pc:chgInfo xmlns:a="http://schemas.openxmlformats.org/drawingml/2006/main" xmlns:r="http://schemas.openxmlformats.org/officeDocument/2006/relationships" xmlns:ac="http://schemas.microsoft.com/office/drawing/2013/main/command" xmlns:pc="http://schemas.microsoft.com/office/powerpoint/2013/main/command">
   <pc:docChgLst>
-    <pc:chgData name="dcszjin@nus.edu.sg" userId="cd05a825-544c-438a-9ba1-08e63db50b47" providerId="ADAL" clId="{6F17B5A8-8938-4206-8B5F-1DF9007C99AC}"/>
-    <pc:docChg chg="undo custSel addSld delSld modSld sldOrd">
-      <pc:chgData name="dcszjin@nus.edu.sg" userId="cd05a825-544c-438a-9ba1-08e63db50b47" providerId="ADAL" clId="{6F17B5A8-8938-4206-8B5F-1DF9007C99AC}" dt="2021-03-08T06:53:03.979" v="1111" actId="20577"/>
+    <pc:chgData name="Zhao Jin" userId="cd05a825-544c-438a-9ba1-08e63db50b47" providerId="ADAL" clId="{5DF3A229-1965-414E-AF54-F4C37AC7DF68}"/>
+    <pc:docChg chg="undo custSel modSld">
+      <pc:chgData name="Zhao Jin" userId="cd05a825-544c-438a-9ba1-08e63db50b47" providerId="ADAL" clId="{5DF3A229-1965-414E-AF54-F4C37AC7DF68}" dt="2026-04-13T07:58:34.009" v="1470" actId="20577"/>
       <pc:docMkLst>
         <pc:docMk/>
       </pc:docMkLst>
       <pc:sldChg chg="modSp mod">
-        <pc:chgData name="dcszjin@nus.edu.sg" userId="cd05a825-544c-438a-9ba1-08e63db50b47" providerId="ADAL" clId="{6F17B5A8-8938-4206-8B5F-1DF9007C99AC}" dt="2021-03-01T07:08:40.699" v="1092" actId="1076"/>
-        <pc:sldMkLst>
-          <pc:docMk/>
-          <pc:sldMk cId="0" sldId="256"/>
-        </pc:sldMkLst>
-      </pc:sldChg>
-      <pc:sldChg chg="modSp mod">
-        <pc:chgData name="dcszjin@nus.edu.sg" userId="cd05a825-544c-438a-9ba1-08e63db50b47" providerId="ADAL" clId="{6F17B5A8-8938-4206-8B5F-1DF9007C99AC}" dt="2021-03-01T06:53:46.482" v="1091"/>
-        <pc:sldMkLst>
-          <pc:docMk/>
-          <pc:sldMk cId="4078418712" sldId="525"/>
-        </pc:sldMkLst>
-      </pc:sldChg>
-      <pc:sldChg chg="modSp add del">
-        <pc:chgData name="dcszjin@nus.edu.sg" userId="cd05a825-544c-438a-9ba1-08e63db50b47" providerId="ADAL" clId="{6F17B5A8-8938-4206-8B5F-1DF9007C99AC}" dt="2021-03-01T06:53:41.009" v="1088"/>
-        <pc:sldMkLst>
-          <pc:docMk/>
-          <pc:sldMk cId="1427618944" sldId="553"/>
-        </pc:sldMkLst>
-      </pc:sldChg>
-      <pc:sldChg chg="del">
-        <pc:chgData name="dcszjin@nus.edu.sg" userId="cd05a825-544c-438a-9ba1-08e63db50b47" providerId="ADAL" clId="{6F17B5A8-8938-4206-8B5F-1DF9007C99AC}" dt="2021-03-01T06:25:00.903" v="56" actId="47"/>
-        <pc:sldMkLst>
-          <pc:docMk/>
-          <pc:sldMk cId="1663851036" sldId="559"/>
-        </pc:sldMkLst>
-      </pc:sldChg>
-      <pc:sldChg chg="del">
-        <pc:chgData name="dcszjin@nus.edu.sg" userId="cd05a825-544c-438a-9ba1-08e63db50b47" providerId="ADAL" clId="{6F17B5A8-8938-4206-8B5F-1DF9007C99AC}" dt="2021-03-01T06:25:00.903" v="56" actId="47"/>
-        <pc:sldMkLst>
-          <pc:docMk/>
-          <pc:sldMk cId="1971208294" sldId="560"/>
-        </pc:sldMkLst>
-      </pc:sldChg>
-      <pc:sldChg chg="del">
-        <pc:chgData name="dcszjin@nus.edu.sg" userId="cd05a825-544c-438a-9ba1-08e63db50b47" providerId="ADAL" clId="{6F17B5A8-8938-4206-8B5F-1DF9007C99AC}" dt="2021-03-01T06:25:00.903" v="56" actId="47"/>
-        <pc:sldMkLst>
-          <pc:docMk/>
-          <pc:sldMk cId="894186310" sldId="564"/>
-        </pc:sldMkLst>
-      </pc:sldChg>
-      <pc:sldChg chg="del">
-        <pc:chgData name="dcszjin@nus.edu.sg" userId="cd05a825-544c-438a-9ba1-08e63db50b47" providerId="ADAL" clId="{6F17B5A8-8938-4206-8B5F-1DF9007C99AC}" dt="2021-03-01T06:25:00.903" v="56" actId="47"/>
-        <pc:sldMkLst>
-          <pc:docMk/>
-          <pc:sldMk cId="4156536479" sldId="590"/>
-        </pc:sldMkLst>
-      </pc:sldChg>
-      <pc:sldChg chg="del">
-        <pc:chgData name="dcszjin@nus.edu.sg" userId="cd05a825-544c-438a-9ba1-08e63db50b47" providerId="ADAL" clId="{6F17B5A8-8938-4206-8B5F-1DF9007C99AC}" dt="2021-03-01T06:25:00.903" v="56" actId="47"/>
-        <pc:sldMkLst>
-          <pc:docMk/>
-          <pc:sldMk cId="2217225800" sldId="594"/>
-        </pc:sldMkLst>
-      </pc:sldChg>
-      <pc:sldChg chg="del">
-        <pc:chgData name="dcszjin@nus.edu.sg" userId="cd05a825-544c-438a-9ba1-08e63db50b47" providerId="ADAL" clId="{6F17B5A8-8938-4206-8B5F-1DF9007C99AC}" dt="2021-03-01T06:25:00.903" v="56" actId="47"/>
-        <pc:sldMkLst>
-          <pc:docMk/>
-          <pc:sldMk cId="2419983458" sldId="595"/>
-        </pc:sldMkLst>
-      </pc:sldChg>
-      <pc:sldChg chg="addSp delSp modSp add mod ord delAnim">
-        <pc:chgData name="dcszjin@nus.edu.sg" userId="cd05a825-544c-438a-9ba1-08e63db50b47" providerId="ADAL" clId="{6F17B5A8-8938-4206-8B5F-1DF9007C99AC}" dt="2021-03-01T06:53:44.441" v="1090"/>
+        <pc:chgData name="Zhao Jin" userId="cd05a825-544c-438a-9ba1-08e63db50b47" providerId="ADAL" clId="{5DF3A229-1965-414E-AF54-F4C37AC7DF68}" dt="2026-04-13T07:02:08.379" v="1416" actId="20577"/>
         <pc:sldMkLst>
           <pc:docMk/>
           <pc:sldMk cId="1542002799" sldId="602"/>
         </pc:sldMkLst>
-      </pc:sldChg>
-      <pc:sldChg chg="addSp delSp modSp add del mod addAnim delAnim">
-        <pc:chgData name="dcszjin@nus.edu.sg" userId="cd05a825-544c-438a-9ba1-08e63db50b47" providerId="ADAL" clId="{6F17B5A8-8938-4206-8B5F-1DF9007C99AC}" dt="2021-03-01T07:15:54.669" v="1096" actId="47"/>
-        <pc:sldMkLst>
-          <pc:docMk/>
-          <pc:sldMk cId="600747522" sldId="604"/>
-        </pc:sldMkLst>
-      </pc:sldChg>
-      <pc:sldChg chg="modSp add mod">
-        <pc:chgData name="dcszjin@nus.edu.sg" userId="cd05a825-544c-438a-9ba1-08e63db50b47" providerId="ADAL" clId="{6F17B5A8-8938-4206-8B5F-1DF9007C99AC}" dt="2021-03-01T06:53:31.297" v="1084"/>
-        <pc:sldMkLst>
-          <pc:docMk/>
-          <pc:sldMk cId="2489370454" sldId="605"/>
-        </pc:sldMkLst>
-      </pc:sldChg>
-      <pc:sldChg chg="delSp modSp add mod">
-        <pc:chgData name="dcszjin@nus.edu.sg" userId="cd05a825-544c-438a-9ba1-08e63db50b47" providerId="ADAL" clId="{6F17B5A8-8938-4206-8B5F-1DF9007C99AC}" dt="2021-03-01T07:17:37.118" v="1107" actId="478"/>
-        <pc:sldMkLst>
-          <pc:docMk/>
-          <pc:sldMk cId="640598186" sldId="606"/>
-        </pc:sldMkLst>
-      </pc:sldChg>
-      <pc:sldChg chg="addSp delSp modSp add del mod delAnim modAnim">
-        <pc:chgData name="dcszjin@nus.edu.sg" userId="cd05a825-544c-438a-9ba1-08e63db50b47" providerId="ADAL" clId="{6F17B5A8-8938-4206-8B5F-1DF9007C99AC}" dt="2021-03-01T06:37:08.889" v="418" actId="47"/>
-        <pc:sldMkLst>
-          <pc:docMk/>
-          <pc:sldMk cId="4199745321" sldId="619"/>
-        </pc:sldMkLst>
-      </pc:sldChg>
-      <pc:sldChg chg="modSp add">
-        <pc:chgData name="dcszjin@nus.edu.sg" userId="cd05a825-544c-438a-9ba1-08e63db50b47" providerId="ADAL" clId="{6F17B5A8-8938-4206-8B5F-1DF9007C99AC}" dt="2021-03-01T06:53:33.809" v="1085"/>
-        <pc:sldMkLst>
-          <pc:docMk/>
-          <pc:sldMk cId="282410985" sldId="620"/>
-        </pc:sldMkLst>
-      </pc:sldChg>
-      <pc:sldChg chg="add del">
-        <pc:chgData name="dcszjin@nus.edu.sg" userId="cd05a825-544c-438a-9ba1-08e63db50b47" providerId="ADAL" clId="{6F17B5A8-8938-4206-8B5F-1DF9007C99AC}" dt="2021-03-01T06:34:44.863" v="242" actId="47"/>
-        <pc:sldMkLst>
-          <pc:docMk/>
-          <pc:sldMk cId="846468992" sldId="621"/>
-        </pc:sldMkLst>
-      </pc:sldChg>
-      <pc:sldChg chg="addSp modSp add mod">
-        <pc:chgData name="dcszjin@nus.edu.sg" userId="cd05a825-544c-438a-9ba1-08e63db50b47" providerId="ADAL" clId="{6F17B5A8-8938-4206-8B5F-1DF9007C99AC}" dt="2021-03-01T06:53:35.760" v="1086"/>
-        <pc:sldMkLst>
-          <pc:docMk/>
-          <pc:sldMk cId="3503582036" sldId="622"/>
-        </pc:sldMkLst>
-      </pc:sldChg>
-      <pc:sldChg chg="modSp add">
-        <pc:chgData name="dcszjin@nus.edu.sg" userId="cd05a825-544c-438a-9ba1-08e63db50b47" providerId="ADAL" clId="{6F17B5A8-8938-4206-8B5F-1DF9007C99AC}" dt="2021-03-01T06:53:37.536" v="1087"/>
-        <pc:sldMkLst>
-          <pc:docMk/>
-          <pc:sldMk cId="1258830549" sldId="635"/>
-        </pc:sldMkLst>
-      </pc:sldChg>
-      <pc:sldChg chg="delSp modSp add del mod delAnim">
-        <pc:chgData name="dcszjin@nus.edu.sg" userId="cd05a825-544c-438a-9ba1-08e63db50b47" providerId="ADAL" clId="{6F17B5A8-8938-4206-8B5F-1DF9007C99AC}" dt="2021-03-01T06:38:19.926" v="441" actId="47"/>
-        <pc:sldMkLst>
-          <pc:docMk/>
-          <pc:sldMk cId="1364216338" sldId="636"/>
-        </pc:sldMkLst>
-      </pc:sldChg>
-      <pc:sldChg chg="addSp delSp modSp add del mod">
-        <pc:chgData name="dcszjin@nus.edu.sg" userId="cd05a825-544c-438a-9ba1-08e63db50b47" providerId="ADAL" clId="{6F17B5A8-8938-4206-8B5F-1DF9007C99AC}" dt="2021-03-01T06:49:01.783" v="721" actId="47"/>
-        <pc:sldMkLst>
-          <pc:docMk/>
-          <pc:sldMk cId="3364444345" sldId="636"/>
-        </pc:sldMkLst>
-      </pc:sldChg>
-      <pc:sldChg chg="add del">
-        <pc:chgData name="dcszjin@nus.edu.sg" userId="cd05a825-544c-438a-9ba1-08e63db50b47" providerId="ADAL" clId="{6F17B5A8-8938-4206-8B5F-1DF9007C99AC}" dt="2021-03-01T06:41:43.577" v="611"/>
-        <pc:sldMkLst>
-          <pc:docMk/>
-          <pc:sldMk cId="1109647801" sldId="637"/>
-        </pc:sldMkLst>
-      </pc:sldChg>
-      <pc:sldChg chg="addSp modSp add mod">
-        <pc:chgData name="dcszjin@nus.edu.sg" userId="cd05a825-544c-438a-9ba1-08e63db50b47" providerId="ADAL" clId="{6F17B5A8-8938-4206-8B5F-1DF9007C99AC}" dt="2021-03-08T06:53:03.979" v="1111" actId="20577"/>
-        <pc:sldMkLst>
-          <pc:docMk/>
-          <pc:sldMk cId="1235845528" sldId="637"/>
-        </pc:sldMkLst>
-      </pc:sldChg>
-    </pc:docChg>
-  </pc:docChgLst>
-  <pc:docChgLst>
-    <pc:chgData name="Zhao Jin" userId="cd05a825-544c-438a-9ba1-08e63db50b47" providerId="ADAL" clId="{40B02829-7445-394A-990C-032942059FD9}"/>
-    <pc:docChg chg="custSel modSld">
-      <pc:chgData name="Zhao Jin" userId="cd05a825-544c-438a-9ba1-08e63db50b47" providerId="ADAL" clId="{40B02829-7445-394A-990C-032942059FD9}" dt="2021-01-18T05:50:34.611" v="4" actId="478"/>
-      <pc:docMkLst>
-        <pc:docMk/>
-      </pc:docMkLst>
-      <pc:sldChg chg="delSp">
-        <pc:chgData name="Zhao Jin" userId="cd05a825-544c-438a-9ba1-08e63db50b47" providerId="ADAL" clId="{40B02829-7445-394A-990C-032942059FD9}" dt="2021-01-18T05:50:34.611" v="4" actId="478"/>
-        <pc:sldMkLst>
-          <pc:docMk/>
-          <pc:sldMk cId="3871162519" sldId="525"/>
-        </pc:sldMkLst>
-      </pc:sldChg>
-      <pc:sldChg chg="modSp">
-        <pc:chgData name="Zhao Jin" userId="cd05a825-544c-438a-9ba1-08e63db50b47" providerId="ADAL" clId="{40B02829-7445-394A-990C-032942059FD9}" dt="2021-01-18T05:50:03.685" v="3" actId="122"/>
-        <pc:sldMkLst>
-          <pc:docMk/>
-          <pc:sldMk cId="770306953" sldId="526"/>
-        </pc:sldMkLst>
-      </pc:sldChg>
-      <pc:sldChg chg="modAnim">
-        <pc:chgData name="Zhao Jin" userId="cd05a825-544c-438a-9ba1-08e63db50b47" providerId="ADAL" clId="{40B02829-7445-394A-990C-032942059FD9}" dt="2021-01-18T05:49:08.491" v="0"/>
-        <pc:sldMkLst>
-          <pc:docMk/>
-          <pc:sldMk cId="4288789163" sldId="527"/>
-        </pc:sldMkLst>
-      </pc:sldChg>
-    </pc:docChg>
-  </pc:docChgLst>
-  <pc:docChgLst>
-    <pc:chgData name="Zhao Jin" userId="cd05a825-544c-438a-9ba1-08e63db50b47" providerId="ADAL" clId="{6A3951C8-7780-4031-8A2B-7971BC0F9707}"/>
-    <pc:docChg chg="modSld">
-      <pc:chgData name="Zhao Jin" userId="cd05a825-544c-438a-9ba1-08e63db50b47" providerId="ADAL" clId="{6A3951C8-7780-4031-8A2B-7971BC0F9707}" dt="2021-01-27T06:40:05.693" v="157" actId="20577"/>
-      <pc:docMkLst>
-        <pc:docMk/>
-      </pc:docMkLst>
-      <pc:sldChg chg="addSp modSp mod">
-        <pc:chgData name="Zhao Jin" userId="cd05a825-544c-438a-9ba1-08e63db50b47" providerId="ADAL" clId="{6A3951C8-7780-4031-8A2B-7971BC0F9707}" dt="2021-01-27T06:39:09.281" v="89" actId="1036"/>
-        <pc:sldMkLst>
-          <pc:docMk/>
-          <pc:sldMk cId="3949125736" sldId="548"/>
-        </pc:sldMkLst>
-      </pc:sldChg>
-      <pc:sldChg chg="addSp modSp mod">
-        <pc:chgData name="Zhao Jin" userId="cd05a825-544c-438a-9ba1-08e63db50b47" providerId="ADAL" clId="{6A3951C8-7780-4031-8A2B-7971BC0F9707}" dt="2021-01-27T06:40:05.693" v="157" actId="20577"/>
-        <pc:sldMkLst>
-          <pc:docMk/>
-          <pc:sldMk cId="2939077141" sldId="549"/>
-        </pc:sldMkLst>
-      </pc:sldChg>
-    </pc:docChg>
-  </pc:docChgLst>
-  <pc:docChgLst>
-    <pc:chgData name="Zhao Jin" userId="cd05a825-544c-438a-9ba1-08e63db50b47" providerId="ADAL" clId="{4F3FAF49-1DF7-4F24-BD45-0FCF078AB041}"/>
-    <pc:docChg chg="undo custSel addSld delSld modSld">
-      <pc:chgData name="Zhao Jin" userId="cd05a825-544c-438a-9ba1-08e63db50b47" providerId="ADAL" clId="{4F3FAF49-1DF7-4F24-BD45-0FCF078AB041}" dt="2024-04-09T06:23:26.892" v="677" actId="20577"/>
-      <pc:docMkLst>
-        <pc:docMk/>
-      </pc:docMkLst>
-      <pc:sldChg chg="modSp">
-        <pc:chgData name="Zhao Jin" userId="cd05a825-544c-438a-9ba1-08e63db50b47" providerId="ADAL" clId="{4F3FAF49-1DF7-4F24-BD45-0FCF078AB041}" dt="2024-04-09T06:23:21.435" v="676"/>
-        <pc:sldMkLst>
-          <pc:docMk/>
-          <pc:sldMk cId="2438607696" sldId="468"/>
-        </pc:sldMkLst>
-      </pc:sldChg>
-      <pc:sldChg chg="modSp mod">
-        <pc:chgData name="Zhao Jin" userId="cd05a825-544c-438a-9ba1-08e63db50b47" providerId="ADAL" clId="{4F3FAF49-1DF7-4F24-BD45-0FCF078AB041}" dt="2024-04-09T06:23:26.892" v="677" actId="20577"/>
-        <pc:sldMkLst>
-          <pc:docMk/>
-          <pc:sldMk cId="4078418712" sldId="525"/>
-        </pc:sldMkLst>
-      </pc:sldChg>
-      <pc:sldChg chg="modSp mod">
-        <pc:chgData name="Zhao Jin" userId="cd05a825-544c-438a-9ba1-08e63db50b47" providerId="ADAL" clId="{4F3FAF49-1DF7-4F24-BD45-0FCF078AB041}" dt="2024-04-09T06:23:21.435" v="676"/>
-        <pc:sldMkLst>
-          <pc:docMk/>
-          <pc:sldMk cId="1542002799" sldId="602"/>
-        </pc:sldMkLst>
-      </pc:sldChg>
-      <pc:sldChg chg="modSp mod">
-        <pc:chgData name="Zhao Jin" userId="cd05a825-544c-438a-9ba1-08e63db50b47" providerId="ADAL" clId="{4F3FAF49-1DF7-4F24-BD45-0FCF078AB041}" dt="2024-04-09T06:23:21.435" v="676"/>
-        <pc:sldMkLst>
-          <pc:docMk/>
-          <pc:sldMk cId="4071526340" sldId="603"/>
-        </pc:sldMkLst>
-      </pc:sldChg>
-      <pc:sldChg chg="modSp">
-        <pc:chgData name="Zhao Jin" userId="cd05a825-544c-438a-9ba1-08e63db50b47" providerId="ADAL" clId="{4F3FAF49-1DF7-4F24-BD45-0FCF078AB041}" dt="2024-04-09T06:23:21.435" v="676"/>
-        <pc:sldMkLst>
-          <pc:docMk/>
-          <pc:sldMk cId="3733356969" sldId="604"/>
-        </pc:sldMkLst>
-      </pc:sldChg>
-      <pc:sldChg chg="modSp mod">
-        <pc:chgData name="Zhao Jin" userId="cd05a825-544c-438a-9ba1-08e63db50b47" providerId="ADAL" clId="{4F3FAF49-1DF7-4F24-BD45-0FCF078AB041}" dt="2024-04-09T06:23:21.435" v="676"/>
-        <pc:sldMkLst>
-          <pc:docMk/>
-          <pc:sldMk cId="1986457205" sldId="605"/>
-        </pc:sldMkLst>
-      </pc:sldChg>
-      <pc:sldChg chg="addSp delSp modSp mod">
-        <pc:chgData name="Zhao Jin" userId="cd05a825-544c-438a-9ba1-08e63db50b47" providerId="ADAL" clId="{4F3FAF49-1DF7-4F24-BD45-0FCF078AB041}" dt="2024-04-09T06:23:21.435" v="676"/>
-        <pc:sldMkLst>
-          <pc:docMk/>
-          <pc:sldMk cId="244432225" sldId="608"/>
-        </pc:sldMkLst>
-      </pc:sldChg>
-      <pc:sldChg chg="modSp del mod">
-        <pc:chgData name="Zhao Jin" userId="cd05a825-544c-438a-9ba1-08e63db50b47" providerId="ADAL" clId="{4F3FAF49-1DF7-4F24-BD45-0FCF078AB041}" dt="2024-04-09T06:13:35.599" v="587" actId="47"/>
-        <pc:sldMkLst>
-          <pc:docMk/>
-          <pc:sldMk cId="1540855360" sldId="609"/>
-        </pc:sldMkLst>
-      </pc:sldChg>
-      <pc:sldChg chg="modSp">
-        <pc:chgData name="Zhao Jin" userId="cd05a825-544c-438a-9ba1-08e63db50b47" providerId="ADAL" clId="{4F3FAF49-1DF7-4F24-BD45-0FCF078AB041}" dt="2024-04-09T06:23:21.435" v="676"/>
-        <pc:sldMkLst>
-          <pc:docMk/>
-          <pc:sldMk cId="1712697869" sldId="610"/>
-        </pc:sldMkLst>
-      </pc:sldChg>
-      <pc:sldChg chg="modSp">
-        <pc:chgData name="Zhao Jin" userId="cd05a825-544c-438a-9ba1-08e63db50b47" providerId="ADAL" clId="{4F3FAF49-1DF7-4F24-BD45-0FCF078AB041}" dt="2024-04-09T06:23:21.435" v="676"/>
-        <pc:sldMkLst>
-          <pc:docMk/>
-          <pc:sldMk cId="875106389" sldId="611"/>
-        </pc:sldMkLst>
-      </pc:sldChg>
-      <pc:sldChg chg="modSp mod">
-        <pc:chgData name="Zhao Jin" userId="cd05a825-544c-438a-9ba1-08e63db50b47" providerId="ADAL" clId="{4F3FAF49-1DF7-4F24-BD45-0FCF078AB041}" dt="2024-04-09T06:23:21.435" v="676"/>
-        <pc:sldMkLst>
-          <pc:docMk/>
-          <pc:sldMk cId="4053289514" sldId="612"/>
-        </pc:sldMkLst>
-      </pc:sldChg>
-      <pc:sldChg chg="modSp add mod">
-        <pc:chgData name="Zhao Jin" userId="cd05a825-544c-438a-9ba1-08e63db50b47" providerId="ADAL" clId="{4F3FAF49-1DF7-4F24-BD45-0FCF078AB041}" dt="2024-04-09T06:23:21.435" v="676"/>
-        <pc:sldMkLst>
-          <pc:docMk/>
-          <pc:sldMk cId="1485799118" sldId="613"/>
-        </pc:sldMkLst>
-      </pc:sldChg>
-    </pc:docChg>
-  </pc:docChgLst>
-  <pc:docChgLst>
-    <pc:chgData name="Zhao Jin" userId="cd05a825-544c-438a-9ba1-08e63db50b47" providerId="ADAL" clId="{867F3690-C100-40EE-A937-14612E9F3314}"/>
-    <pc:docChg chg="undo custSel addSld delSld modSld">
-      <pc:chgData name="Zhao Jin" userId="cd05a825-544c-438a-9ba1-08e63db50b47" providerId="ADAL" clId="{867F3690-C100-40EE-A937-14612E9F3314}" dt="2021-02-15T05:07:12.447" v="312" actId="1076"/>
-      <pc:docMkLst>
-        <pc:docMk/>
-      </pc:docMkLst>
-      <pc:sldChg chg="modSp mod">
-        <pc:chgData name="Zhao Jin" userId="cd05a825-544c-438a-9ba1-08e63db50b47" providerId="ADAL" clId="{867F3690-C100-40EE-A937-14612E9F3314}" dt="2021-02-10T03:53:02.282" v="0" actId="20577"/>
-        <pc:sldMkLst>
-          <pc:docMk/>
-          <pc:sldMk cId="0" sldId="256"/>
-        </pc:sldMkLst>
-      </pc:sldChg>
-      <pc:sldChg chg="modSp del">
-        <pc:chgData name="Zhao Jin" userId="cd05a825-544c-438a-9ba1-08e63db50b47" providerId="ADAL" clId="{867F3690-C100-40EE-A937-14612E9F3314}" dt="2021-02-11T11:12:55.303" v="2" actId="47"/>
-        <pc:sldMkLst>
-          <pc:docMk/>
-          <pc:sldMk cId="2775173622" sldId="524"/>
-        </pc:sldMkLst>
-      </pc:sldChg>
-      <pc:sldChg chg="modSp mod">
-        <pc:chgData name="Zhao Jin" userId="cd05a825-544c-438a-9ba1-08e63db50b47" providerId="ADAL" clId="{867F3690-C100-40EE-A937-14612E9F3314}" dt="2021-02-11T11:16:16.653" v="199" actId="207"/>
-        <pc:sldMkLst>
-          <pc:docMk/>
-          <pc:sldMk cId="4078418712" sldId="525"/>
-        </pc:sldMkLst>
-      </pc:sldChg>
-      <pc:sldChg chg="modSp del">
-        <pc:chgData name="Zhao Jin" userId="cd05a825-544c-438a-9ba1-08e63db50b47" providerId="ADAL" clId="{867F3690-C100-40EE-A937-14612E9F3314}" dt="2021-02-11T11:12:55.303" v="2" actId="47"/>
-        <pc:sldMkLst>
-          <pc:docMk/>
-          <pc:sldMk cId="2882118053" sldId="552"/>
-        </pc:sldMkLst>
-      </pc:sldChg>
-      <pc:sldChg chg="modSp add mod">
-        <pc:chgData name="Zhao Jin" userId="cd05a825-544c-438a-9ba1-08e63db50b47" providerId="ADAL" clId="{867F3690-C100-40EE-A937-14612E9F3314}" dt="2021-02-15T04:57:13.323" v="201"/>
-        <pc:sldMkLst>
-          <pc:docMk/>
-          <pc:sldMk cId="1427618944" sldId="553"/>
-        </pc:sldMkLst>
-      </pc:sldChg>
-      <pc:sldChg chg="modSp del">
-        <pc:chgData name="Zhao Jin" userId="cd05a825-544c-438a-9ba1-08e63db50b47" providerId="ADAL" clId="{867F3690-C100-40EE-A937-14612E9F3314}" dt="2021-02-11T11:12:55.303" v="2" actId="47"/>
-        <pc:sldMkLst>
-          <pc:docMk/>
-          <pc:sldMk cId="2082920116" sldId="553"/>
-        </pc:sldMkLst>
-      </pc:sldChg>
-      <pc:sldChg chg="modSp del">
-        <pc:chgData name="Zhao Jin" userId="cd05a825-544c-438a-9ba1-08e63db50b47" providerId="ADAL" clId="{867F3690-C100-40EE-A937-14612E9F3314}" dt="2021-02-11T11:12:55.303" v="2" actId="47"/>
-        <pc:sldMkLst>
-          <pc:docMk/>
-          <pc:sldMk cId="1659983766" sldId="554"/>
-        </pc:sldMkLst>
-      </pc:sldChg>
-      <pc:sldChg chg="modSp del">
-        <pc:chgData name="Zhao Jin" userId="cd05a825-544c-438a-9ba1-08e63db50b47" providerId="ADAL" clId="{867F3690-C100-40EE-A937-14612E9F3314}" dt="2021-02-11T11:12:55.303" v="2" actId="47"/>
-        <pc:sldMkLst>
-          <pc:docMk/>
-          <pc:sldMk cId="686532275" sldId="558"/>
-        </pc:sldMkLst>
-      </pc:sldChg>
-      <pc:sldChg chg="modSp add del mod">
-        <pc:chgData name="Zhao Jin" userId="cd05a825-544c-438a-9ba1-08e63db50b47" providerId="ADAL" clId="{867F3690-C100-40EE-A937-14612E9F3314}" dt="2021-02-15T04:59:11.851" v="203" actId="207"/>
-        <pc:sldMkLst>
-          <pc:docMk/>
-          <pc:sldMk cId="1663851036" sldId="559"/>
-        </pc:sldMkLst>
-      </pc:sldChg>
-      <pc:sldChg chg="addSp delSp modSp add mod">
-        <pc:chgData name="Zhao Jin" userId="cd05a825-544c-438a-9ba1-08e63db50b47" providerId="ADAL" clId="{867F3690-C100-40EE-A937-14612E9F3314}" dt="2021-02-15T05:07:12.447" v="312" actId="1076"/>
-        <pc:sldMkLst>
-          <pc:docMk/>
-          <pc:sldMk cId="1971208294" sldId="560"/>
-        </pc:sldMkLst>
-      </pc:sldChg>
-      <pc:sldChg chg="modSp del">
-        <pc:chgData name="Zhao Jin" userId="cd05a825-544c-438a-9ba1-08e63db50b47" providerId="ADAL" clId="{867F3690-C100-40EE-A937-14612E9F3314}" dt="2021-02-11T11:12:55.303" v="2" actId="47"/>
-        <pc:sldMkLst>
-          <pc:docMk/>
-          <pc:sldMk cId="1986771488" sldId="561"/>
-        </pc:sldMkLst>
-      </pc:sldChg>
-      <pc:sldChg chg="modSp add mod">
-        <pc:chgData name="Zhao Jin" userId="cd05a825-544c-438a-9ba1-08e63db50b47" providerId="ADAL" clId="{867F3690-C100-40EE-A937-14612E9F3314}" dt="2021-02-11T11:14:08.750" v="27" actId="20577"/>
-        <pc:sldMkLst>
-          <pc:docMk/>
-          <pc:sldMk cId="894186310" sldId="564"/>
-        </pc:sldMkLst>
-      </pc:sldChg>
-      <pc:sldChg chg="modSp del">
-        <pc:chgData name="Zhao Jin" userId="cd05a825-544c-438a-9ba1-08e63db50b47" providerId="ADAL" clId="{867F3690-C100-40EE-A937-14612E9F3314}" dt="2021-02-11T11:12:55.303" v="2" actId="47"/>
-        <pc:sldMkLst>
-          <pc:docMk/>
-          <pc:sldMk cId="1276365520" sldId="564"/>
-        </pc:sldMkLst>
-      </pc:sldChg>
-      <pc:sldChg chg="modSp del">
-        <pc:chgData name="Zhao Jin" userId="cd05a825-544c-438a-9ba1-08e63db50b47" providerId="ADAL" clId="{867F3690-C100-40EE-A937-14612E9F3314}" dt="2021-02-11T11:12:55.303" v="2" actId="47"/>
-        <pc:sldMkLst>
-          <pc:docMk/>
-          <pc:sldMk cId="827193018" sldId="565"/>
-        </pc:sldMkLst>
-      </pc:sldChg>
-      <pc:sldChg chg="modSp del">
-        <pc:chgData name="Zhao Jin" userId="cd05a825-544c-438a-9ba1-08e63db50b47" providerId="ADAL" clId="{867F3690-C100-40EE-A937-14612E9F3314}" dt="2021-02-11T11:12:55.303" v="2" actId="47"/>
-        <pc:sldMkLst>
-          <pc:docMk/>
-          <pc:sldMk cId="3959984611" sldId="566"/>
-        </pc:sldMkLst>
-      </pc:sldChg>
-      <pc:sldChg chg="modSp del">
-        <pc:chgData name="Zhao Jin" userId="cd05a825-544c-438a-9ba1-08e63db50b47" providerId="ADAL" clId="{867F3690-C100-40EE-A937-14612E9F3314}" dt="2021-02-11T11:12:55.303" v="2" actId="47"/>
-        <pc:sldMkLst>
-          <pc:docMk/>
-          <pc:sldMk cId="2879329457" sldId="568"/>
-        </pc:sldMkLst>
-      </pc:sldChg>
-      <pc:sldChg chg="modSp del">
-        <pc:chgData name="Zhao Jin" userId="cd05a825-544c-438a-9ba1-08e63db50b47" providerId="ADAL" clId="{867F3690-C100-40EE-A937-14612E9F3314}" dt="2021-02-11T11:12:55.303" v="2" actId="47"/>
-        <pc:sldMkLst>
-          <pc:docMk/>
-          <pc:sldMk cId="4240540711" sldId="569"/>
-        </pc:sldMkLst>
-      </pc:sldChg>
-      <pc:sldChg chg="delSp modSp add mod delAnim">
-        <pc:chgData name="Zhao Jin" userId="cd05a825-544c-438a-9ba1-08e63db50b47" providerId="ADAL" clId="{867F3690-C100-40EE-A937-14612E9F3314}" dt="2021-02-15T04:58:14.889" v="202" actId="478"/>
-        <pc:sldMkLst>
-          <pc:docMk/>
-          <pc:sldMk cId="4156536479" sldId="590"/>
-        </pc:sldMkLst>
-      </pc:sldChg>
-      <pc:sldChg chg="modSp add mod">
-        <pc:chgData name="Zhao Jin" userId="cd05a825-544c-438a-9ba1-08e63db50b47" providerId="ADAL" clId="{867F3690-C100-40EE-A937-14612E9F3314}" dt="2021-02-11T11:13:35.741" v="11"/>
-        <pc:sldMkLst>
-          <pc:docMk/>
-          <pc:sldMk cId="2217225800" sldId="594"/>
-        </pc:sldMkLst>
-      </pc:sldChg>
-      <pc:sldChg chg="delSp modSp add mod">
-        <pc:chgData name="Zhao Jin" userId="cd05a825-544c-438a-9ba1-08e63db50b47" providerId="ADAL" clId="{867F3690-C100-40EE-A937-14612E9F3314}" dt="2021-02-11T11:13:40.184" v="13" actId="478"/>
-        <pc:sldMkLst>
-          <pc:docMk/>
-          <pc:sldMk cId="2419983458" sldId="595"/>
-        </pc:sldMkLst>
-      </pc:sldChg>
-    </pc:docChg>
-  </pc:docChgLst>
-  <pc:docChgLst>
-    <pc:chgData name="Zhao Jin" userId="cd05a825-544c-438a-9ba1-08e63db50b47" providerId="ADAL" clId="{D2C53CB4-D98E-4A4D-AB3B-F903C3FA77B9}"/>
-    <pc:docChg chg="undo custSel addSld delSld modSld">
-      <pc:chgData name="Zhao Jin" userId="cd05a825-544c-438a-9ba1-08e63db50b47" providerId="ADAL" clId="{D2C53CB4-D98E-4A4D-AB3B-F903C3FA77B9}" dt="2021-03-08T05:37:18.936" v="540"/>
-      <pc:docMkLst>
-        <pc:docMk/>
-      </pc:docMkLst>
-      <pc:sldChg chg="modSp mod">
-        <pc:chgData name="Zhao Jin" userId="cd05a825-544c-438a-9ba1-08e63db50b47" providerId="ADAL" clId="{D2C53CB4-D98E-4A4D-AB3B-F903C3FA77B9}" dt="2021-03-01T05:22:09.674" v="0" actId="20577"/>
-        <pc:sldMkLst>
-          <pc:docMk/>
-          <pc:sldMk cId="0" sldId="256"/>
-        </pc:sldMkLst>
-      </pc:sldChg>
-      <pc:sldChg chg="modAnim">
-        <pc:chgData name="Zhao Jin" userId="cd05a825-544c-438a-9ba1-08e63db50b47" providerId="ADAL" clId="{D2C53CB4-D98E-4A4D-AB3B-F903C3FA77B9}" dt="2021-03-08T05:37:18.936" v="540"/>
-        <pc:sldMkLst>
-          <pc:docMk/>
-          <pc:sldMk cId="1427618944" sldId="553"/>
-        </pc:sldMkLst>
-      </pc:sldChg>
-      <pc:sldChg chg="delSp modSp add del mod">
-        <pc:chgData name="Zhao Jin" userId="cd05a825-544c-438a-9ba1-08e63db50b47" providerId="ADAL" clId="{D2C53CB4-D98E-4A4D-AB3B-F903C3FA77B9}" dt="2021-03-08T05:22:34.940" v="208" actId="47"/>
-        <pc:sldMkLst>
-          <pc:docMk/>
-          <pc:sldMk cId="830535321" sldId="603"/>
-        </pc:sldMkLst>
-      </pc:sldChg>
-      <pc:sldChg chg="modSp mod">
-        <pc:chgData name="Zhao Jin" userId="cd05a825-544c-438a-9ba1-08e63db50b47" providerId="ADAL" clId="{D2C53CB4-D98E-4A4D-AB3B-F903C3FA77B9}" dt="2021-03-08T05:28:03.001" v="534" actId="20577"/>
-        <pc:sldMkLst>
-          <pc:docMk/>
-          <pc:sldMk cId="640598186" sldId="606"/>
-        </pc:sldMkLst>
-      </pc:sldChg>
-      <pc:sldChg chg="addSp delSp modSp add mod modAnim">
-        <pc:chgData name="Zhao Jin" userId="cd05a825-544c-438a-9ba1-08e63db50b47" providerId="ADAL" clId="{D2C53CB4-D98E-4A4D-AB3B-F903C3FA77B9}" dt="2021-03-08T05:36:39.052" v="539" actId="20577"/>
-        <pc:sldMkLst>
-          <pc:docMk/>
-          <pc:sldMk cId="3042096305" sldId="638"/>
-        </pc:sldMkLst>
-      </pc:sldChg>
-    </pc:docChg>
-  </pc:docChgLst>
-  <pc:docChgLst>
-    <pc:chgData name="Zhao Jin" userId="cd05a825-544c-438a-9ba1-08e63db50b47" providerId="ADAL" clId="{39F94C1A-1739-2146-9770-28C6D97CD74A}"/>
-    <pc:docChg chg="undo custSel addSld delSld modSld">
-      <pc:chgData name="Zhao Jin" userId="cd05a825-544c-438a-9ba1-08e63db50b47" providerId="ADAL" clId="{39F94C1A-1739-2146-9770-28C6D97CD74A}" dt="2021-01-27T04:54:28.852" v="864" actId="20577"/>
-      <pc:docMkLst>
-        <pc:docMk/>
-      </pc:docMkLst>
-      <pc:sldChg chg="modSp">
-        <pc:chgData name="Zhao Jin" userId="cd05a825-544c-438a-9ba1-08e63db50b47" providerId="ADAL" clId="{39F94C1A-1739-2146-9770-28C6D97CD74A}" dt="2021-01-27T04:29:55.834" v="1" actId="20577"/>
-        <pc:sldMkLst>
-          <pc:docMk/>
-          <pc:sldMk cId="0" sldId="256"/>
-        </pc:sldMkLst>
-      </pc:sldChg>
-      <pc:sldChg chg="addSp delSp modSp add delAnim modAnim">
-        <pc:chgData name="Zhao Jin" userId="cd05a825-544c-438a-9ba1-08e63db50b47" providerId="ADAL" clId="{39F94C1A-1739-2146-9770-28C6D97CD74A}" dt="2021-01-27T04:54:22.999" v="862" actId="20577"/>
-        <pc:sldMkLst>
-          <pc:docMk/>
-          <pc:sldMk cId="1492339910" sldId="485"/>
-        </pc:sldMkLst>
-      </pc:sldChg>
-      <pc:sldChg chg="addSp delSp modSp add modAnim">
-        <pc:chgData name="Zhao Jin" userId="cd05a825-544c-438a-9ba1-08e63db50b47" providerId="ADAL" clId="{39F94C1A-1739-2146-9770-28C6D97CD74A}" dt="2021-01-27T04:54:02.548" v="843" actId="20577"/>
-        <pc:sldMkLst>
-          <pc:docMk/>
-          <pc:sldMk cId="2775173622" sldId="524"/>
-        </pc:sldMkLst>
-      </pc:sldChg>
-      <pc:sldChg chg="add del">
-        <pc:chgData name="Zhao Jin" userId="cd05a825-544c-438a-9ba1-08e63db50b47" providerId="ADAL" clId="{39F94C1A-1739-2146-9770-28C6D97CD74A}" dt="2021-01-27T04:50:24.218" v="666"/>
-        <pc:sldMkLst>
-          <pc:docMk/>
-          <pc:sldMk cId="4023450610" sldId="524"/>
-        </pc:sldMkLst>
-      </pc:sldChg>
-      <pc:sldChg chg="del">
-        <pc:chgData name="Zhao Jin" userId="cd05a825-544c-438a-9ba1-08e63db50b47" providerId="ADAL" clId="{39F94C1A-1739-2146-9770-28C6D97CD74A}" dt="2021-01-27T04:30:02.278" v="7" actId="2696"/>
-        <pc:sldMkLst>
-          <pc:docMk/>
-          <pc:sldMk cId="3871162519" sldId="525"/>
-        </pc:sldMkLst>
-      </pc:sldChg>
-      <pc:sldChg chg="delSp modSp add">
-        <pc:chgData name="Zhao Jin" userId="cd05a825-544c-438a-9ba1-08e63db50b47" providerId="ADAL" clId="{39F94C1A-1739-2146-9770-28C6D97CD74A}" dt="2021-01-27T04:54:28.852" v="864" actId="20577"/>
-        <pc:sldMkLst>
-          <pc:docMk/>
-          <pc:sldMk cId="4078418712" sldId="525"/>
-        </pc:sldMkLst>
-      </pc:sldChg>
-      <pc:sldChg chg="del">
-        <pc:chgData name="Zhao Jin" userId="cd05a825-544c-438a-9ba1-08e63db50b47" providerId="ADAL" clId="{39F94C1A-1739-2146-9770-28C6D97CD74A}" dt="2021-01-27T04:30:02.169" v="2" actId="2696"/>
-        <pc:sldMkLst>
-          <pc:docMk/>
-          <pc:sldMk cId="2543678377" sldId="531"/>
-        </pc:sldMkLst>
-      </pc:sldChg>
-      <pc:sldChg chg="del">
-        <pc:chgData name="Zhao Jin" userId="cd05a825-544c-438a-9ba1-08e63db50b47" providerId="ADAL" clId="{39F94C1A-1739-2146-9770-28C6D97CD74A}" dt="2021-01-27T04:30:02.196" v="3" actId="2696"/>
-        <pc:sldMkLst>
-          <pc:docMk/>
-          <pc:sldMk cId="2025693378" sldId="532"/>
-        </pc:sldMkLst>
-      </pc:sldChg>
-      <pc:sldChg chg="del">
-        <pc:chgData name="Zhao Jin" userId="cd05a825-544c-438a-9ba1-08e63db50b47" providerId="ADAL" clId="{39F94C1A-1739-2146-9770-28C6D97CD74A}" dt="2021-01-27T04:30:02.254" v="5" actId="2696"/>
-        <pc:sldMkLst>
-          <pc:docMk/>
-          <pc:sldMk cId="266706937" sldId="533"/>
-        </pc:sldMkLst>
-      </pc:sldChg>
-      <pc:sldChg chg="del">
-        <pc:chgData name="Zhao Jin" userId="cd05a825-544c-438a-9ba1-08e63db50b47" providerId="ADAL" clId="{39F94C1A-1739-2146-9770-28C6D97CD74A}" dt="2021-01-27T04:30:02.230" v="4" actId="2696"/>
-        <pc:sldMkLst>
-          <pc:docMk/>
-          <pc:sldMk cId="3198948174" sldId="535"/>
-        </pc:sldMkLst>
-      </pc:sldChg>
-      <pc:sldChg chg="del">
-        <pc:chgData name="Zhao Jin" userId="cd05a825-544c-438a-9ba1-08e63db50b47" providerId="ADAL" clId="{39F94C1A-1739-2146-9770-28C6D97CD74A}" dt="2021-01-27T04:30:02.268" v="6" actId="2696"/>
-        <pc:sldMkLst>
-          <pc:docMk/>
-          <pc:sldMk cId="3984392134" sldId="537"/>
-        </pc:sldMkLst>
-      </pc:sldChg>
-      <pc:sldChg chg="modSp add">
-        <pc:chgData name="Zhao Jin" userId="cd05a825-544c-438a-9ba1-08e63db50b47" providerId="ADAL" clId="{39F94C1A-1739-2146-9770-28C6D97CD74A}" dt="2021-01-27T04:54:10.942" v="852" actId="20577"/>
-        <pc:sldMkLst>
-          <pc:docMk/>
-          <pc:sldMk cId="3949125736" sldId="548"/>
-        </pc:sldMkLst>
-      </pc:sldChg>
-      <pc:sldChg chg="modSp add">
-        <pc:chgData name="Zhao Jin" userId="cd05a825-544c-438a-9ba1-08e63db50b47" providerId="ADAL" clId="{39F94C1A-1739-2146-9770-28C6D97CD74A}" dt="2021-01-27T04:54:14.716" v="857" actId="20577"/>
-        <pc:sldMkLst>
-          <pc:docMk/>
-          <pc:sldMk cId="2939077141" sldId="549"/>
-        </pc:sldMkLst>
-      </pc:sldChg>
-    </pc:docChg>
-  </pc:docChgLst>
-  <pc:docChgLst>
-    <pc:chgData name="Zhao Jin" userId="cd05a825-544c-438a-9ba1-08e63db50b47" providerId="ADAL" clId="{E962FB48-A774-46D5-9A82-D859C958B9D9}"/>
-    <pc:docChg chg="undo custSel addSld delSld modSld sldOrd">
-      <pc:chgData name="Zhao Jin" userId="cd05a825-544c-438a-9ba1-08e63db50b47" providerId="ADAL" clId="{E962FB48-A774-46D5-9A82-D859C958B9D9}" dt="2021-04-12T04:22:07.534" v="3696" actId="20577"/>
-      <pc:docMkLst>
-        <pc:docMk/>
-      </pc:docMkLst>
-      <pc:sldChg chg="modSp mod">
-        <pc:chgData name="Zhao Jin" userId="cd05a825-544c-438a-9ba1-08e63db50b47" providerId="ADAL" clId="{E962FB48-A774-46D5-9A82-D859C958B9D9}" dt="2021-03-30T07:28:23.649" v="47" actId="20577"/>
-        <pc:sldMkLst>
-          <pc:docMk/>
-          <pc:sldMk cId="0" sldId="256"/>
-        </pc:sldMkLst>
-      </pc:sldChg>
-      <pc:sldChg chg="modSp add mod">
-        <pc:chgData name="Zhao Jin" userId="cd05a825-544c-438a-9ba1-08e63db50b47" providerId="ADAL" clId="{E962FB48-A774-46D5-9A82-D859C958B9D9}" dt="2021-03-30T07:31:07.129" v="194" actId="6549"/>
-        <pc:sldMkLst>
-          <pc:docMk/>
-          <pc:sldMk cId="2438607696" sldId="468"/>
-        </pc:sldMkLst>
-      </pc:sldChg>
-      <pc:sldChg chg="modSp mod">
-        <pc:chgData name="Zhao Jin" userId="cd05a825-544c-438a-9ba1-08e63db50b47" providerId="ADAL" clId="{E962FB48-A774-46D5-9A82-D859C958B9D9}" dt="2021-04-12T04:20:12.933" v="3507" actId="20577"/>
-        <pc:sldMkLst>
-          <pc:docMk/>
-          <pc:sldMk cId="4078418712" sldId="525"/>
-        </pc:sldMkLst>
-      </pc:sldChg>
-      <pc:sldChg chg="del">
-        <pc:chgData name="Zhao Jin" userId="cd05a825-544c-438a-9ba1-08e63db50b47" providerId="ADAL" clId="{E962FB48-A774-46D5-9A82-D859C958B9D9}" dt="2021-03-30T07:30:48.188" v="159" actId="47"/>
-        <pc:sldMkLst>
-          <pc:docMk/>
-          <pc:sldMk cId="1427618944" sldId="553"/>
-        </pc:sldMkLst>
-      </pc:sldChg>
-      <pc:sldChg chg="delSp modSp mod">
-        <pc:chgData name="Zhao Jin" userId="cd05a825-544c-438a-9ba1-08e63db50b47" providerId="ADAL" clId="{E962FB48-A774-46D5-9A82-D859C958B9D9}" dt="2021-04-07T07:16:03.815" v="317" actId="20577"/>
-        <pc:sldMkLst>
-          <pc:docMk/>
-          <pc:sldMk cId="1542002799" sldId="602"/>
-        </pc:sldMkLst>
-      </pc:sldChg>
-      <pc:sldChg chg="addSp delSp modSp add mod ord">
-        <pc:chgData name="Zhao Jin" userId="cd05a825-544c-438a-9ba1-08e63db50b47" providerId="ADAL" clId="{E962FB48-A774-46D5-9A82-D859C958B9D9}" dt="2021-04-12T04:21:06.183" v="3576" actId="478"/>
-        <pc:sldMkLst>
-          <pc:docMk/>
-          <pc:sldMk cId="4071526340" sldId="603"/>
-        </pc:sldMkLst>
-      </pc:sldChg>
-      <pc:sldChg chg="add del">
-        <pc:chgData name="Zhao Jin" userId="cd05a825-544c-438a-9ba1-08e63db50b47" providerId="ADAL" clId="{E962FB48-A774-46D5-9A82-D859C958B9D9}" dt="2021-04-07T07:16:37.494" v="319"/>
-        <pc:sldMkLst>
-          <pc:docMk/>
-          <pc:sldMk cId="22642075" sldId="604"/>
-        </pc:sldMkLst>
-      </pc:sldChg>
-      <pc:sldChg chg="addSp delSp modSp add del mod">
-        <pc:chgData name="Zhao Jin" userId="cd05a825-544c-438a-9ba1-08e63db50b47" providerId="ADAL" clId="{E962FB48-A774-46D5-9A82-D859C958B9D9}" dt="2021-04-07T08:08:57.340" v="3285" actId="1036"/>
-        <pc:sldMkLst>
-          <pc:docMk/>
-          <pc:sldMk cId="3733356969" sldId="604"/>
-        </pc:sldMkLst>
-      </pc:sldChg>
-      <pc:sldChg chg="modSp add mod">
-        <pc:chgData name="Zhao Jin" userId="cd05a825-544c-438a-9ba1-08e63db50b47" providerId="ADAL" clId="{E962FB48-A774-46D5-9A82-D859C958B9D9}" dt="2021-04-07T07:37:39.672" v="2480" actId="20577"/>
-        <pc:sldMkLst>
-          <pc:docMk/>
-          <pc:sldMk cId="1986457205" sldId="605"/>
-        </pc:sldMkLst>
-      </pc:sldChg>
-      <pc:sldChg chg="del">
-        <pc:chgData name="Zhao Jin" userId="cd05a825-544c-438a-9ba1-08e63db50b47" providerId="ADAL" clId="{E962FB48-A774-46D5-9A82-D859C958B9D9}" dt="2021-03-30T07:30:48.188" v="159" actId="47"/>
-        <pc:sldMkLst>
-          <pc:docMk/>
-          <pc:sldMk cId="2489370454" sldId="605"/>
-        </pc:sldMkLst>
-      </pc:sldChg>
-      <pc:sldChg chg="del">
-        <pc:chgData name="Zhao Jin" userId="cd05a825-544c-438a-9ba1-08e63db50b47" providerId="ADAL" clId="{E962FB48-A774-46D5-9A82-D859C958B9D9}" dt="2021-03-30T07:30:48.188" v="159" actId="47"/>
-        <pc:sldMkLst>
-          <pc:docMk/>
-          <pc:sldMk cId="640598186" sldId="606"/>
-        </pc:sldMkLst>
-      </pc:sldChg>
-      <pc:sldChg chg="modSp add del mod">
-        <pc:chgData name="Zhao Jin" userId="cd05a825-544c-438a-9ba1-08e63db50b47" providerId="ADAL" clId="{E962FB48-A774-46D5-9A82-D859C958B9D9}" dt="2021-04-07T07:36:36.841" v="2403" actId="47"/>
-        <pc:sldMkLst>
-          <pc:docMk/>
-          <pc:sldMk cId="3491841051" sldId="606"/>
-        </pc:sldMkLst>
-      </pc:sldChg>
-      <pc:sldChg chg="add del">
-        <pc:chgData name="Zhao Jin" userId="cd05a825-544c-438a-9ba1-08e63db50b47" providerId="ADAL" clId="{E962FB48-A774-46D5-9A82-D859C958B9D9}" dt="2021-04-07T07:36:37.630" v="2404" actId="47"/>
-        <pc:sldMkLst>
-          <pc:docMk/>
-          <pc:sldMk cId="3326857269" sldId="607"/>
-        </pc:sldMkLst>
-      </pc:sldChg>
-      <pc:sldChg chg="modSp add mod">
-        <pc:chgData name="Zhao Jin" userId="cd05a825-544c-438a-9ba1-08e63db50b47" providerId="ADAL" clId="{E962FB48-A774-46D5-9A82-D859C958B9D9}" dt="2021-04-12T04:18:08.127" v="3291" actId="6549"/>
-        <pc:sldMkLst>
-          <pc:docMk/>
-          <pc:sldMk cId="244432225" sldId="608"/>
-        </pc:sldMkLst>
-      </pc:sldChg>
-      <pc:sldChg chg="modSp add mod">
-        <pc:chgData name="Zhao Jin" userId="cd05a825-544c-438a-9ba1-08e63db50b47" providerId="ADAL" clId="{E962FB48-A774-46D5-9A82-D859C958B9D9}" dt="2021-04-07T07:37:26.136" v="2470" actId="20577"/>
-        <pc:sldMkLst>
-          <pc:docMk/>
-          <pc:sldMk cId="1540855360" sldId="609"/>
-        </pc:sldMkLst>
-      </pc:sldChg>
-      <pc:sldChg chg="addSp delSp modSp add mod modAnim">
-        <pc:chgData name="Zhao Jin" userId="cd05a825-544c-438a-9ba1-08e63db50b47" providerId="ADAL" clId="{E962FB48-A774-46D5-9A82-D859C958B9D9}" dt="2021-04-07T08:08:14.638" v="3271" actId="14100"/>
-        <pc:sldMkLst>
-          <pc:docMk/>
-          <pc:sldMk cId="1712697869" sldId="610"/>
-        </pc:sldMkLst>
-      </pc:sldChg>
-      <pc:sldChg chg="addSp delSp modSp add mod modAnim">
-        <pc:chgData name="Zhao Jin" userId="cd05a825-544c-438a-9ba1-08e63db50b47" providerId="ADAL" clId="{E962FB48-A774-46D5-9A82-D859C958B9D9}" dt="2021-04-12T04:19:37.279" v="3415" actId="20577"/>
-        <pc:sldMkLst>
-          <pc:docMk/>
-          <pc:sldMk cId="875106389" sldId="611"/>
-        </pc:sldMkLst>
-      </pc:sldChg>
-      <pc:sldChg chg="modSp add mod">
-        <pc:chgData name="Zhao Jin" userId="cd05a825-544c-438a-9ba1-08e63db50b47" providerId="ADAL" clId="{E962FB48-A774-46D5-9A82-D859C958B9D9}" dt="2021-04-12T04:22:07.534" v="3696" actId="20577"/>
-        <pc:sldMkLst>
-          <pc:docMk/>
-          <pc:sldMk cId="4053289514" sldId="612"/>
-        </pc:sldMkLst>
-      </pc:sldChg>
-      <pc:sldChg chg="del">
-        <pc:chgData name="Zhao Jin" userId="cd05a825-544c-438a-9ba1-08e63db50b47" providerId="ADAL" clId="{E962FB48-A774-46D5-9A82-D859C958B9D9}" dt="2021-03-30T07:30:48.188" v="159" actId="47"/>
-        <pc:sldMkLst>
-          <pc:docMk/>
-          <pc:sldMk cId="282410985" sldId="620"/>
-        </pc:sldMkLst>
-      </pc:sldChg>
-      <pc:sldChg chg="del">
-        <pc:chgData name="Zhao Jin" userId="cd05a825-544c-438a-9ba1-08e63db50b47" providerId="ADAL" clId="{E962FB48-A774-46D5-9A82-D859C958B9D9}" dt="2021-03-30T07:30:48.188" v="159" actId="47"/>
-        <pc:sldMkLst>
-          <pc:docMk/>
-          <pc:sldMk cId="3503582036" sldId="622"/>
-        </pc:sldMkLst>
-      </pc:sldChg>
-      <pc:sldChg chg="del">
-        <pc:chgData name="Zhao Jin" userId="cd05a825-544c-438a-9ba1-08e63db50b47" providerId="ADAL" clId="{E962FB48-A774-46D5-9A82-D859C958B9D9}" dt="2021-03-30T07:30:48.188" v="159" actId="47"/>
-        <pc:sldMkLst>
-          <pc:docMk/>
-          <pc:sldMk cId="1258830549" sldId="635"/>
-        </pc:sldMkLst>
-      </pc:sldChg>
-      <pc:sldChg chg="del">
-        <pc:chgData name="Zhao Jin" userId="cd05a825-544c-438a-9ba1-08e63db50b47" providerId="ADAL" clId="{E962FB48-A774-46D5-9A82-D859C958B9D9}" dt="2021-03-30T07:30:48.188" v="159" actId="47"/>
-        <pc:sldMkLst>
-          <pc:docMk/>
-          <pc:sldMk cId="1235845528" sldId="637"/>
-        </pc:sldMkLst>
-      </pc:sldChg>
-      <pc:sldChg chg="del">
-        <pc:chgData name="Zhao Jin" userId="cd05a825-544c-438a-9ba1-08e63db50b47" providerId="ADAL" clId="{E962FB48-A774-46D5-9A82-D859C958B9D9}" dt="2021-03-30T07:30:48.188" v="159" actId="47"/>
-        <pc:sldMkLst>
-          <pc:docMk/>
-          <pc:sldMk cId="3042096305" sldId="638"/>
-        </pc:sldMkLst>
-      </pc:sldChg>
-    </pc:docChg>
-  </pc:docChgLst>
-  <pc:docChgLst>
-    <pc:chgData name="Zhao Jin" userId="cd05a825-544c-438a-9ba1-08e63db50b47" providerId="ADAL" clId="{FB8F02A0-9B99-4C9E-A1D1-3BF41D9621D7}"/>
-    <pc:docChg chg="undo custSel addSld delSld modSld sldOrd">
-      <pc:chgData name="Zhao Jin" userId="cd05a825-544c-438a-9ba1-08e63db50b47" providerId="ADAL" clId="{FB8F02A0-9B99-4C9E-A1D1-3BF41D9621D7}" dt="2021-02-08T02:21:29.074" v="2208" actId="20577"/>
-      <pc:docMkLst>
-        <pc:docMk/>
-      </pc:docMkLst>
-      <pc:sldChg chg="modSp">
-        <pc:chgData name="Zhao Jin" userId="cd05a825-544c-438a-9ba1-08e63db50b47" providerId="ADAL" clId="{FB8F02A0-9B99-4C9E-A1D1-3BF41D9621D7}" dt="2021-02-03T06:53:35.324" v="0"/>
-        <pc:sldMkLst>
-          <pc:docMk/>
-          <pc:sldMk cId="0" sldId="256"/>
-        </pc:sldMkLst>
-      </pc:sldChg>
-      <pc:sldChg chg="modSp del">
-        <pc:chgData name="Zhao Jin" userId="cd05a825-544c-438a-9ba1-08e63db50b47" providerId="ADAL" clId="{FB8F02A0-9B99-4C9E-A1D1-3BF41D9621D7}" dt="2021-02-03T07:15:04.758" v="547" actId="47"/>
-        <pc:sldMkLst>
-          <pc:docMk/>
-          <pc:sldMk cId="1492339910" sldId="485"/>
-        </pc:sldMkLst>
-      </pc:sldChg>
-      <pc:sldChg chg="addSp modSp add del mod">
-        <pc:chgData name="Zhao Jin" userId="cd05a825-544c-438a-9ba1-08e63db50b47" providerId="ADAL" clId="{FB8F02A0-9B99-4C9E-A1D1-3BF41D9621D7}" dt="2021-02-03T07:45:22.990" v="2123" actId="20577"/>
-        <pc:sldMkLst>
-          <pc:docMk/>
-          <pc:sldMk cId="2775173622" sldId="524"/>
-        </pc:sldMkLst>
-      </pc:sldChg>
-      <pc:sldChg chg="modSp mod">
-        <pc:chgData name="Zhao Jin" userId="cd05a825-544c-438a-9ba1-08e63db50b47" providerId="ADAL" clId="{FB8F02A0-9B99-4C9E-A1D1-3BF41D9621D7}" dt="2021-02-03T09:16:16.308" v="2184" actId="20577"/>
-        <pc:sldMkLst>
-          <pc:docMk/>
-          <pc:sldMk cId="4078418712" sldId="525"/>
-        </pc:sldMkLst>
-      </pc:sldChg>
-      <pc:sldChg chg="modSp del">
-        <pc:chgData name="Zhao Jin" userId="cd05a825-544c-438a-9ba1-08e63db50b47" providerId="ADAL" clId="{FB8F02A0-9B99-4C9E-A1D1-3BF41D9621D7}" dt="2021-02-03T07:02:36.712" v="7" actId="47"/>
-        <pc:sldMkLst>
-          <pc:docMk/>
-          <pc:sldMk cId="3949125736" sldId="548"/>
-        </pc:sldMkLst>
-      </pc:sldChg>
-      <pc:sldChg chg="modSp del">
-        <pc:chgData name="Zhao Jin" userId="cd05a825-544c-438a-9ba1-08e63db50b47" providerId="ADAL" clId="{FB8F02A0-9B99-4C9E-A1D1-3BF41D9621D7}" dt="2021-02-03T07:02:36.889" v="8" actId="47"/>
-        <pc:sldMkLst>
-          <pc:docMk/>
-          <pc:sldMk cId="2939077141" sldId="549"/>
-        </pc:sldMkLst>
-      </pc:sldChg>
-      <pc:sldChg chg="add del">
-        <pc:chgData name="Zhao Jin" userId="cd05a825-544c-438a-9ba1-08e63db50b47" providerId="ADAL" clId="{FB8F02A0-9B99-4C9E-A1D1-3BF41D9621D7}" dt="2021-02-03T07:07:45.930" v="221" actId="47"/>
-        <pc:sldMkLst>
-          <pc:docMk/>
-          <pc:sldMk cId="1352675019" sldId="551"/>
-        </pc:sldMkLst>
-      </pc:sldChg>
-      <pc:sldChg chg="addSp delSp modSp add mod">
-        <pc:chgData name="Zhao Jin" userId="cd05a825-544c-438a-9ba1-08e63db50b47" providerId="ADAL" clId="{FB8F02A0-9B99-4C9E-A1D1-3BF41D9621D7}" dt="2021-02-03T07:41:34.595" v="1864" actId="20578"/>
-        <pc:sldMkLst>
-          <pc:docMk/>
-          <pc:sldMk cId="2882118053" sldId="552"/>
-        </pc:sldMkLst>
-      </pc:sldChg>
-      <pc:sldChg chg="modSp add mod">
-        <pc:chgData name="Zhao Jin" userId="cd05a825-544c-438a-9ba1-08e63db50b47" providerId="ADAL" clId="{FB8F02A0-9B99-4C9E-A1D1-3BF41D9621D7}" dt="2021-02-03T07:20:30.275" v="935"/>
-        <pc:sldMkLst>
-          <pc:docMk/>
-          <pc:sldMk cId="2082920116" sldId="553"/>
-        </pc:sldMkLst>
-      </pc:sldChg>
-      <pc:sldChg chg="addSp delSp modSp add mod modAnim">
-        <pc:chgData name="Zhao Jin" userId="cd05a825-544c-438a-9ba1-08e63db50b47" providerId="ADAL" clId="{FB8F02A0-9B99-4C9E-A1D1-3BF41D9621D7}" dt="2021-02-03T07:42:15.454" v="1867" actId="20577"/>
-        <pc:sldMkLst>
-          <pc:docMk/>
-          <pc:sldMk cId="1659983766" sldId="554"/>
-        </pc:sldMkLst>
-      </pc:sldChg>
-      <pc:sldChg chg="addSp delSp modSp add del mod">
-        <pc:chgData name="Zhao Jin" userId="cd05a825-544c-438a-9ba1-08e63db50b47" providerId="ADAL" clId="{FB8F02A0-9B99-4C9E-A1D1-3BF41D9621D7}" dt="2021-02-03T07:07:06.993" v="219" actId="47"/>
-        <pc:sldMkLst>
-          <pc:docMk/>
-          <pc:sldMk cId="1268238251" sldId="555"/>
-        </pc:sldMkLst>
-      </pc:sldChg>
-      <pc:sldChg chg="modSp add del mod">
-        <pc:chgData name="Zhao Jin" userId="cd05a825-544c-438a-9ba1-08e63db50b47" providerId="ADAL" clId="{FB8F02A0-9B99-4C9E-A1D1-3BF41D9621D7}" dt="2021-02-03T07:42:30.854" v="1869" actId="47"/>
-        <pc:sldMkLst>
-          <pc:docMk/>
-          <pc:sldMk cId="788021743" sldId="557"/>
-        </pc:sldMkLst>
-      </pc:sldChg>
-      <pc:sldChg chg="delSp modSp add mod">
-        <pc:chgData name="Zhao Jin" userId="cd05a825-544c-438a-9ba1-08e63db50b47" providerId="ADAL" clId="{FB8F02A0-9B99-4C9E-A1D1-3BF41D9621D7}" dt="2021-02-08T02:19:37.781" v="2198" actId="478"/>
-        <pc:sldMkLst>
-          <pc:docMk/>
-          <pc:sldMk cId="686532275" sldId="558"/>
-        </pc:sldMkLst>
-      </pc:sldChg>
-      <pc:sldChg chg="delSp modSp add del mod delAnim">
-        <pc:chgData name="Zhao Jin" userId="cd05a825-544c-438a-9ba1-08e63db50b47" providerId="ADAL" clId="{FB8F02A0-9B99-4C9E-A1D1-3BF41D9621D7}" dt="2021-02-03T07:30:13.895" v="1095" actId="47"/>
-        <pc:sldMkLst>
-          <pc:docMk/>
-          <pc:sldMk cId="182578491" sldId="559"/>
-        </pc:sldMkLst>
-      </pc:sldChg>
-      <pc:sldChg chg="modSp add mod">
-        <pc:chgData name="Zhao Jin" userId="cd05a825-544c-438a-9ba1-08e63db50b47" providerId="ADAL" clId="{FB8F02A0-9B99-4C9E-A1D1-3BF41D9621D7}" dt="2021-02-03T07:20:33.509" v="937"/>
-        <pc:sldMkLst>
-          <pc:docMk/>
-          <pc:sldMk cId="1986771488" sldId="561"/>
-        </pc:sldMkLst>
-      </pc:sldChg>
-      <pc:sldChg chg="addSp delSp modSp add del mod delAnim modAnim">
-        <pc:chgData name="Zhao Jin" userId="cd05a825-544c-438a-9ba1-08e63db50b47" providerId="ADAL" clId="{FB8F02A0-9B99-4C9E-A1D1-3BF41D9621D7}" dt="2021-02-03T07:41:57.313" v="1865" actId="47"/>
-        <pc:sldMkLst>
-          <pc:docMk/>
-          <pc:sldMk cId="92291925" sldId="563"/>
-        </pc:sldMkLst>
-      </pc:sldChg>
-      <pc:sldChg chg="addSp modSp add mod modAnim">
-        <pc:chgData name="Zhao Jin" userId="cd05a825-544c-438a-9ba1-08e63db50b47" providerId="ADAL" clId="{FB8F02A0-9B99-4C9E-A1D1-3BF41D9621D7}" dt="2021-02-03T07:20:31.915" v="936"/>
-        <pc:sldMkLst>
-          <pc:docMk/>
-          <pc:sldMk cId="1276365520" sldId="564"/>
-        </pc:sldMkLst>
-      </pc:sldChg>
-      <pc:sldChg chg="delSp modSp add mod">
-        <pc:chgData name="Zhao Jin" userId="cd05a825-544c-438a-9ba1-08e63db50b47" providerId="ADAL" clId="{FB8F02A0-9B99-4C9E-A1D1-3BF41D9621D7}" dt="2021-02-03T07:20:28.829" v="934"/>
-        <pc:sldMkLst>
-          <pc:docMk/>
-          <pc:sldMk cId="827193018" sldId="565"/>
-        </pc:sldMkLst>
-      </pc:sldChg>
-      <pc:sldChg chg="modSp add mod">
-        <pc:chgData name="Zhao Jin" userId="cd05a825-544c-438a-9ba1-08e63db50b47" providerId="ADAL" clId="{FB8F02A0-9B99-4C9E-A1D1-3BF41D9621D7}" dt="2021-02-08T02:21:29.074" v="2208" actId="20577"/>
-        <pc:sldMkLst>
-          <pc:docMk/>
-          <pc:sldMk cId="3959984611" sldId="566"/>
-        </pc:sldMkLst>
-      </pc:sldChg>
-      <pc:sldChg chg="add del">
-        <pc:chgData name="Zhao Jin" userId="cd05a825-544c-438a-9ba1-08e63db50b47" providerId="ADAL" clId="{FB8F02A0-9B99-4C9E-A1D1-3BF41D9621D7}" dt="2021-02-03T07:34:00.322" v="1372" actId="47"/>
-        <pc:sldMkLst>
-          <pc:docMk/>
-          <pc:sldMk cId="243231529" sldId="567"/>
-        </pc:sldMkLst>
-      </pc:sldChg>
-      <pc:sldChg chg="modSp add del mod">
-        <pc:chgData name="Zhao Jin" userId="cd05a825-544c-438a-9ba1-08e63db50b47" providerId="ADAL" clId="{FB8F02A0-9B99-4C9E-A1D1-3BF41D9621D7}" dt="2021-02-03T07:30:57.488" v="1096" actId="47"/>
-        <pc:sldMkLst>
-          <pc:docMk/>
-          <pc:sldMk cId="3003604107" sldId="567"/>
-        </pc:sldMkLst>
-      </pc:sldChg>
-      <pc:sldChg chg="addSp delSp modSp add mod ord">
-        <pc:chgData name="Zhao Jin" userId="cd05a825-544c-438a-9ba1-08e63db50b47" providerId="ADAL" clId="{FB8F02A0-9B99-4C9E-A1D1-3BF41D9621D7}" dt="2021-02-03T07:45:20.173" v="2121" actId="20577"/>
-        <pc:sldMkLst>
-          <pc:docMk/>
-          <pc:sldMk cId="2879329457" sldId="568"/>
-        </pc:sldMkLst>
-      </pc:sldChg>
-      <pc:sldChg chg="modSp add mod">
-        <pc:chgData name="Zhao Jin" userId="cd05a825-544c-438a-9ba1-08e63db50b47" providerId="ADAL" clId="{FB8F02A0-9B99-4C9E-A1D1-3BF41D9621D7}" dt="2021-02-03T07:42:36.973" v="1870"/>
-        <pc:sldMkLst>
-          <pc:docMk/>
-          <pc:sldMk cId="4240540711" sldId="569"/>
-        </pc:sldMkLst>
-      </pc:sldChg>
-    </pc:docChg>
-  </pc:docChgLst>
-  <pc:docChgLst>
-    <pc:chgData name="Zhao Jin" userId="cd05a825-544c-438a-9ba1-08e63db50b47" providerId="ADAL" clId="{4396834B-C94C-4A03-BF7D-9E9F456CFBC2}"/>
-    <pc:docChg chg="modSld">
-      <pc:chgData name="Zhao Jin" userId="cd05a825-544c-438a-9ba1-08e63db50b47" providerId="ADAL" clId="{4396834B-C94C-4A03-BF7D-9E9F456CFBC2}" dt="2021-03-10T03:38:09.139" v="2"/>
-      <pc:docMkLst>
-        <pc:docMk/>
-      </pc:docMkLst>
-      <pc:sldChg chg="modSp mod">
-        <pc:chgData name="Zhao Jin" userId="cd05a825-544c-438a-9ba1-08e63db50b47" providerId="ADAL" clId="{4396834B-C94C-4A03-BF7D-9E9F456CFBC2}" dt="2021-03-10T03:38:01.813" v="1" actId="20577"/>
-        <pc:sldMkLst>
-          <pc:docMk/>
-          <pc:sldMk cId="0" sldId="256"/>
-        </pc:sldMkLst>
-      </pc:sldChg>
-      <pc:sldChg chg="modSp">
-        <pc:chgData name="Zhao Jin" userId="cd05a825-544c-438a-9ba1-08e63db50b47" providerId="ADAL" clId="{4396834B-C94C-4A03-BF7D-9E9F456CFBC2}" dt="2021-03-10T03:38:09.139" v="2"/>
-        <pc:sldMkLst>
-          <pc:docMk/>
-          <pc:sldMk cId="4078418712" sldId="525"/>
-        </pc:sldMkLst>
-      </pc:sldChg>
-      <pc:sldChg chg="modSp">
-        <pc:chgData name="Zhao Jin" userId="cd05a825-544c-438a-9ba1-08e63db50b47" providerId="ADAL" clId="{4396834B-C94C-4A03-BF7D-9E9F456CFBC2}" dt="2021-03-10T03:38:09.139" v="2"/>
-        <pc:sldMkLst>
-          <pc:docMk/>
-          <pc:sldMk cId="1427618944" sldId="553"/>
-        </pc:sldMkLst>
-      </pc:sldChg>
-      <pc:sldChg chg="modSp">
-        <pc:chgData name="Zhao Jin" userId="cd05a825-544c-438a-9ba1-08e63db50b47" providerId="ADAL" clId="{4396834B-C94C-4A03-BF7D-9E9F456CFBC2}" dt="2021-03-10T03:38:09.139" v="2"/>
-        <pc:sldMkLst>
-          <pc:docMk/>
-          <pc:sldMk cId="1542002799" sldId="602"/>
-        </pc:sldMkLst>
-      </pc:sldChg>
-      <pc:sldChg chg="modSp">
-        <pc:chgData name="Zhao Jin" userId="cd05a825-544c-438a-9ba1-08e63db50b47" providerId="ADAL" clId="{4396834B-C94C-4A03-BF7D-9E9F456CFBC2}" dt="2021-03-10T03:38:09.139" v="2"/>
-        <pc:sldMkLst>
-          <pc:docMk/>
-          <pc:sldMk cId="2489370454" sldId="605"/>
-        </pc:sldMkLst>
-      </pc:sldChg>
-      <pc:sldChg chg="modSp">
-        <pc:chgData name="Zhao Jin" userId="cd05a825-544c-438a-9ba1-08e63db50b47" providerId="ADAL" clId="{4396834B-C94C-4A03-BF7D-9E9F456CFBC2}" dt="2021-03-10T03:38:09.139" v="2"/>
-        <pc:sldMkLst>
-          <pc:docMk/>
-          <pc:sldMk cId="640598186" sldId="606"/>
-        </pc:sldMkLst>
-      </pc:sldChg>
-      <pc:sldChg chg="modSp">
-        <pc:chgData name="Zhao Jin" userId="cd05a825-544c-438a-9ba1-08e63db50b47" providerId="ADAL" clId="{4396834B-C94C-4A03-BF7D-9E9F456CFBC2}" dt="2021-03-10T03:38:09.139" v="2"/>
-        <pc:sldMkLst>
-          <pc:docMk/>
-          <pc:sldMk cId="282410985" sldId="620"/>
-        </pc:sldMkLst>
-      </pc:sldChg>
-      <pc:sldChg chg="modSp">
-        <pc:chgData name="Zhao Jin" userId="cd05a825-544c-438a-9ba1-08e63db50b47" providerId="ADAL" clId="{4396834B-C94C-4A03-BF7D-9E9F456CFBC2}" dt="2021-03-10T03:38:09.139" v="2"/>
-        <pc:sldMkLst>
-          <pc:docMk/>
-          <pc:sldMk cId="3503582036" sldId="622"/>
-        </pc:sldMkLst>
-      </pc:sldChg>
-      <pc:sldChg chg="modSp">
-        <pc:chgData name="Zhao Jin" userId="cd05a825-544c-438a-9ba1-08e63db50b47" providerId="ADAL" clId="{4396834B-C94C-4A03-BF7D-9E9F456CFBC2}" dt="2021-03-10T03:38:09.139" v="2"/>
-        <pc:sldMkLst>
-          <pc:docMk/>
-          <pc:sldMk cId="1258830549" sldId="635"/>
-        </pc:sldMkLst>
-      </pc:sldChg>
-      <pc:sldChg chg="modSp">
-        <pc:chgData name="Zhao Jin" userId="cd05a825-544c-438a-9ba1-08e63db50b47" providerId="ADAL" clId="{4396834B-C94C-4A03-BF7D-9E9F456CFBC2}" dt="2021-03-10T03:38:09.139" v="2"/>
-        <pc:sldMkLst>
-          <pc:docMk/>
-          <pc:sldMk cId="1235845528" sldId="637"/>
-        </pc:sldMkLst>
-      </pc:sldChg>
-      <pc:sldChg chg="modSp">
-        <pc:chgData name="Zhao Jin" userId="cd05a825-544c-438a-9ba1-08e63db50b47" providerId="ADAL" clId="{4396834B-C94C-4A03-BF7D-9E9F456CFBC2}" dt="2021-03-10T03:38:09.139" v="2"/>
-        <pc:sldMkLst>
-          <pc:docMk/>
-          <pc:sldMk cId="3042096305" sldId="638"/>
-        </pc:sldMkLst>
-      </pc:sldChg>
-    </pc:docChg>
-  </pc:docChgLst>
-  <pc:docChgLst>
-    <pc:chgData name="Zhao Jin" userId="cd05a825-544c-438a-9ba1-08e63db50b47" providerId="ADAL" clId="{32139915-BA8D-4B17-9EA3-473011EF776E}"/>
-    <pc:docChg chg="addSld modSld">
-      <pc:chgData name="Zhao Jin" userId="cd05a825-544c-438a-9ba1-08e63db50b47" providerId="ADAL" clId="{32139915-BA8D-4B17-9EA3-473011EF776E}" dt="2025-04-10T08:46:05.469" v="256" actId="14100"/>
-      <pc:docMkLst>
-        <pc:docMk/>
-      </pc:docMkLst>
-      <pc:sldChg chg="modSp mod">
-        <pc:chgData name="Zhao Jin" userId="cd05a825-544c-438a-9ba1-08e63db50b47" providerId="ADAL" clId="{32139915-BA8D-4B17-9EA3-473011EF776E}" dt="2025-04-10T08:46:05.469" v="256" actId="14100"/>
-        <pc:sldMkLst>
-          <pc:docMk/>
-          <pc:sldMk cId="4078418712" sldId="525"/>
-        </pc:sldMkLst>
         <pc:spChg chg="mod">
-          <ac:chgData name="Zhao Jin" userId="cd05a825-544c-438a-9ba1-08e63db50b47" providerId="ADAL" clId="{32139915-BA8D-4B17-9EA3-473011EF776E}" dt="2025-04-10T08:46:05.469" v="256" actId="14100"/>
+          <ac:chgData name="Zhao Jin" userId="cd05a825-544c-438a-9ba1-08e63db50b47" providerId="ADAL" clId="{5DF3A229-1965-414E-AF54-F4C37AC7DF68}" dt="2026-04-13T07:02:08.379" v="1416" actId="20577"/>
           <ac:spMkLst>
             <pc:docMk/>
-            <pc:sldMk cId="4078418712" sldId="525"/>
+            <pc:sldMk cId="1542002799" sldId="602"/>
             <ac:spMk id="8" creationId="{00000000-0000-0000-0000-000000000000}"/>
           </ac:spMkLst>
         </pc:spChg>
       </pc:sldChg>
       <pc:sldChg chg="modSp mod">
-        <pc:chgData name="Zhao Jin" userId="cd05a825-544c-438a-9ba1-08e63db50b47" providerId="ADAL" clId="{32139915-BA8D-4B17-9EA3-473011EF776E}" dt="2025-04-10T08:42:08.498" v="14" actId="20577"/>
+        <pc:chgData name="Zhao Jin" userId="cd05a825-544c-438a-9ba1-08e63db50b47" providerId="ADAL" clId="{5DF3A229-1965-414E-AF54-F4C37AC7DF68}" dt="2026-04-13T07:58:34.009" v="1470" actId="20577"/>
         <pc:sldMkLst>
           <pc:docMk/>
           <pc:sldMk cId="4071526340" sldId="603"/>
         </pc:sldMkLst>
         <pc:spChg chg="mod">
-          <ac:chgData name="Zhao Jin" userId="cd05a825-544c-438a-9ba1-08e63db50b47" providerId="ADAL" clId="{32139915-BA8D-4B17-9EA3-473011EF776E}" dt="2025-04-10T08:42:08.498" v="14" actId="20577"/>
+          <ac:chgData name="Zhao Jin" userId="cd05a825-544c-438a-9ba1-08e63db50b47" providerId="ADAL" clId="{5DF3A229-1965-414E-AF54-F4C37AC7DF68}" dt="2026-04-13T07:58:34.009" v="1470" actId="20577"/>
           <ac:spMkLst>
             <pc:docMk/>
             <pc:sldMk cId="4071526340" sldId="603"/>
@@ -1253,13 +233,13 @@
         </pc:spChg>
       </pc:sldChg>
       <pc:sldChg chg="modSp mod">
-        <pc:chgData name="Zhao Jin" userId="cd05a825-544c-438a-9ba1-08e63db50b47" providerId="ADAL" clId="{32139915-BA8D-4B17-9EA3-473011EF776E}" dt="2025-04-10T08:42:54.925" v="77" actId="6549"/>
+        <pc:chgData name="Zhao Jin" userId="cd05a825-544c-438a-9ba1-08e63db50b47" providerId="ADAL" clId="{5DF3A229-1965-414E-AF54-F4C37AC7DF68}" dt="2026-04-13T06:52:16.931" v="909" actId="6549"/>
         <pc:sldMkLst>
           <pc:docMk/>
           <pc:sldMk cId="1986457205" sldId="605"/>
         </pc:sldMkLst>
         <pc:spChg chg="mod">
-          <ac:chgData name="Zhao Jin" userId="cd05a825-544c-438a-9ba1-08e63db50b47" providerId="ADAL" clId="{32139915-BA8D-4B17-9EA3-473011EF776E}" dt="2025-04-10T08:42:54.925" v="77" actId="6549"/>
+          <ac:chgData name="Zhao Jin" userId="cd05a825-544c-438a-9ba1-08e63db50b47" providerId="ADAL" clId="{5DF3A229-1965-414E-AF54-F4C37AC7DF68}" dt="2026-04-13T06:52:16.931" v="909" actId="6549"/>
           <ac:spMkLst>
             <pc:docMk/>
             <pc:sldMk cId="1986457205" sldId="605"/>
@@ -1268,13 +248,13 @@
         </pc:spChg>
       </pc:sldChg>
       <pc:sldChg chg="modSp mod">
-        <pc:chgData name="Zhao Jin" userId="cd05a825-544c-438a-9ba1-08e63db50b47" providerId="ADAL" clId="{32139915-BA8D-4B17-9EA3-473011EF776E}" dt="2025-04-10T08:44:05.783" v="118" actId="403"/>
+        <pc:chgData name="Zhao Jin" userId="cd05a825-544c-438a-9ba1-08e63db50b47" providerId="ADAL" clId="{5DF3A229-1965-414E-AF54-F4C37AC7DF68}" dt="2026-04-13T06:51:17.692" v="877" actId="5793"/>
         <pc:sldMkLst>
           <pc:docMk/>
           <pc:sldMk cId="244432225" sldId="608"/>
         </pc:sldMkLst>
         <pc:spChg chg="mod">
-          <ac:chgData name="Zhao Jin" userId="cd05a825-544c-438a-9ba1-08e63db50b47" providerId="ADAL" clId="{32139915-BA8D-4B17-9EA3-473011EF776E}" dt="2025-04-10T08:44:05.783" v="118" actId="403"/>
+          <ac:chgData name="Zhao Jin" userId="cd05a825-544c-438a-9ba1-08e63db50b47" providerId="ADAL" clId="{5DF3A229-1965-414E-AF54-F4C37AC7DF68}" dt="2026-04-13T06:51:17.692" v="877" actId="5793"/>
           <ac:spMkLst>
             <pc:docMk/>
             <pc:sldMk cId="244432225" sldId="608"/>
@@ -1283,13 +263,13 @@
         </pc:spChg>
       </pc:sldChg>
       <pc:sldChg chg="modSp mod">
-        <pc:chgData name="Zhao Jin" userId="cd05a825-544c-438a-9ba1-08e63db50b47" providerId="ADAL" clId="{32139915-BA8D-4B17-9EA3-473011EF776E}" dt="2025-04-10T08:44:34.308" v="154" actId="5793"/>
+        <pc:chgData name="Zhao Jin" userId="cd05a825-544c-438a-9ba1-08e63db50b47" providerId="ADAL" clId="{5DF3A229-1965-414E-AF54-F4C37AC7DF68}" dt="2026-04-13T06:47:01.895" v="752" actId="20577"/>
         <pc:sldMkLst>
           <pc:docMk/>
           <pc:sldMk cId="4053289514" sldId="612"/>
         </pc:sldMkLst>
         <pc:spChg chg="mod">
-          <ac:chgData name="Zhao Jin" userId="cd05a825-544c-438a-9ba1-08e63db50b47" providerId="ADAL" clId="{32139915-BA8D-4B17-9EA3-473011EF776E}" dt="2025-04-10T08:44:34.308" v="154" actId="5793"/>
+          <ac:chgData name="Zhao Jin" userId="cd05a825-544c-438a-9ba1-08e63db50b47" providerId="ADAL" clId="{5DF3A229-1965-414E-AF54-F4C37AC7DF68}" dt="2026-04-13T06:47:01.895" v="752" actId="20577"/>
           <ac:spMkLst>
             <pc:docMk/>
             <pc:sldMk cId="4053289514" sldId="612"/>
@@ -1298,13 +278,13 @@
         </pc:spChg>
       </pc:sldChg>
       <pc:sldChg chg="modSp mod">
-        <pc:chgData name="Zhao Jin" userId="cd05a825-544c-438a-9ba1-08e63db50b47" providerId="ADAL" clId="{32139915-BA8D-4B17-9EA3-473011EF776E}" dt="2025-04-10T08:43:52.775" v="99" actId="20577"/>
+        <pc:chgData name="Zhao Jin" userId="cd05a825-544c-438a-9ba1-08e63db50b47" providerId="ADAL" clId="{5DF3A229-1965-414E-AF54-F4C37AC7DF68}" dt="2026-04-13T06:50:53.626" v="872" actId="20577"/>
         <pc:sldMkLst>
           <pc:docMk/>
           <pc:sldMk cId="1485799118" sldId="613"/>
         </pc:sldMkLst>
         <pc:spChg chg="mod">
-          <ac:chgData name="Zhao Jin" userId="cd05a825-544c-438a-9ba1-08e63db50b47" providerId="ADAL" clId="{32139915-BA8D-4B17-9EA3-473011EF776E}" dt="2025-04-10T08:43:52.775" v="99" actId="20577"/>
+          <ac:chgData name="Zhao Jin" userId="cd05a825-544c-438a-9ba1-08e63db50b47" providerId="ADAL" clId="{5DF3A229-1965-414E-AF54-F4C37AC7DF68}" dt="2026-04-13T06:50:53.626" v="872" actId="20577"/>
           <ac:spMkLst>
             <pc:docMk/>
             <pc:sldMk cId="1485799118" sldId="613"/>
@@ -1312,157 +292,20 @@
           </ac:spMkLst>
         </pc:spChg>
       </pc:sldChg>
-      <pc:sldChg chg="modSp add mod">
-        <pc:chgData name="Zhao Jin" userId="cd05a825-544c-438a-9ba1-08e63db50b47" providerId="ADAL" clId="{32139915-BA8D-4B17-9EA3-473011EF776E}" dt="2025-04-10T08:45:33.825" v="253" actId="20577"/>
+      <pc:sldChg chg="modSp mod">
+        <pc:chgData name="Zhao Jin" userId="cd05a825-544c-438a-9ba1-08e63db50b47" providerId="ADAL" clId="{5DF3A229-1965-414E-AF54-F4C37AC7DF68}" dt="2026-04-13T07:05:31.561" v="1419" actId="6549"/>
         <pc:sldMkLst>
           <pc:docMk/>
           <pc:sldMk cId="3865777220" sldId="614"/>
         </pc:sldMkLst>
         <pc:spChg chg="mod">
-          <ac:chgData name="Zhao Jin" userId="cd05a825-544c-438a-9ba1-08e63db50b47" providerId="ADAL" clId="{32139915-BA8D-4B17-9EA3-473011EF776E}" dt="2025-04-10T08:45:33.825" v="253" actId="20577"/>
+          <ac:chgData name="Zhao Jin" userId="cd05a825-544c-438a-9ba1-08e63db50b47" providerId="ADAL" clId="{5DF3A229-1965-414E-AF54-F4C37AC7DF68}" dt="2026-04-13T07:05:31.561" v="1419" actId="6549"/>
           <ac:spMkLst>
             <pc:docMk/>
             <pc:sldMk cId="3865777220" sldId="614"/>
             <ac:spMk id="8" creationId="{C258A7DE-EC58-F2C7-CF50-BDD348410213}"/>
           </ac:spMkLst>
         </pc:spChg>
-        <pc:spChg chg="mod">
-          <ac:chgData name="Zhao Jin" userId="cd05a825-544c-438a-9ba1-08e63db50b47" providerId="ADAL" clId="{32139915-BA8D-4B17-9EA3-473011EF776E}" dt="2025-04-10T08:44:39.367" v="168" actId="20577"/>
-          <ac:spMkLst>
-            <pc:docMk/>
-            <pc:sldMk cId="3865777220" sldId="614"/>
-            <ac:spMk id="14338" creationId="{BA6BB3C3-1657-D7D9-0648-E35D33DAB8A0}"/>
-          </ac:spMkLst>
-        </pc:spChg>
-      </pc:sldChg>
-    </pc:docChg>
-  </pc:docChgLst>
-  <pc:docChgLst>
-    <pc:chgData name="Zhao Jin" userId="cd05a825-544c-438a-9ba1-08e63db50b47" providerId="ADAL" clId="{B950E08D-EE9B-49F3-84A1-19FD83FD34DF}"/>
-    <pc:docChg chg="undo custSel modSld modMainMaster">
-      <pc:chgData name="Zhao Jin" userId="cd05a825-544c-438a-9ba1-08e63db50b47" providerId="ADAL" clId="{B950E08D-EE9B-49F3-84A1-19FD83FD34DF}" dt="2025-01-07T07:10:24.499" v="26" actId="20577"/>
-      <pc:docMkLst>
-        <pc:docMk/>
-      </pc:docMkLst>
-      <pc:sldChg chg="addSp delSp mod">
-        <pc:chgData name="Zhao Jin" userId="cd05a825-544c-438a-9ba1-08e63db50b47" providerId="ADAL" clId="{B950E08D-EE9B-49F3-84A1-19FD83FD34DF}" dt="2025-01-07T07:09:08.661" v="1" actId="22"/>
-        <pc:sldMkLst>
-          <pc:docMk/>
-          <pc:sldMk cId="0" sldId="256"/>
-        </pc:sldMkLst>
-      </pc:sldChg>
-      <pc:sldMasterChg chg="modSldLayout">
-        <pc:chgData name="Zhao Jin" userId="cd05a825-544c-438a-9ba1-08e63db50b47" providerId="ADAL" clId="{B950E08D-EE9B-49F3-84A1-19FD83FD34DF}" dt="2025-01-07T07:10:24.499" v="26" actId="20577"/>
-        <pc:sldMasterMkLst>
-          <pc:docMk/>
-          <pc:sldMasterMk cId="0" sldId="2147485087"/>
-        </pc:sldMasterMkLst>
-        <pc:sldLayoutChg chg="modSp mod">
-          <pc:chgData name="Zhao Jin" userId="cd05a825-544c-438a-9ba1-08e63db50b47" providerId="ADAL" clId="{B950E08D-EE9B-49F3-84A1-19FD83FD34DF}" dt="2025-01-07T07:10:24.499" v="26" actId="20577"/>
-          <pc:sldLayoutMkLst>
-            <pc:docMk/>
-            <pc:sldMasterMk cId="0" sldId="2147485087"/>
-            <pc:sldLayoutMk cId="0" sldId="2147485088"/>
-          </pc:sldLayoutMkLst>
-        </pc:sldLayoutChg>
-      </pc:sldMasterChg>
-    </pc:docChg>
-  </pc:docChgLst>
-  <pc:docChgLst>
-    <pc:chgData name="Zhao Jin" userId="cd05a825-544c-438a-9ba1-08e63db50b47" providerId="ADAL" clId="{808744AD-B406-4BA4-99A6-CBE5C8BAA8F4}"/>
-    <pc:docChg chg="custSel modSld">
-      <pc:chgData name="Zhao Jin" userId="cd05a825-544c-438a-9ba1-08e63db50b47" providerId="ADAL" clId="{808744AD-B406-4BA4-99A6-CBE5C8BAA8F4}" dt="2025-04-15T01:51:45.124" v="0" actId="313"/>
-      <pc:docMkLst>
-        <pc:docMk/>
-      </pc:docMkLst>
-      <pc:sldChg chg="modSp mod">
-        <pc:chgData name="Zhao Jin" userId="cd05a825-544c-438a-9ba1-08e63db50b47" providerId="ADAL" clId="{808744AD-B406-4BA4-99A6-CBE5C8BAA8F4}" dt="2025-04-15T01:51:45.124" v="0" actId="313"/>
-        <pc:sldMkLst>
-          <pc:docMk/>
-          <pc:sldMk cId="3865777220" sldId="614"/>
-        </pc:sldMkLst>
-        <pc:spChg chg="mod">
-          <ac:chgData name="Zhao Jin" userId="cd05a825-544c-438a-9ba1-08e63db50b47" providerId="ADAL" clId="{808744AD-B406-4BA4-99A6-CBE5C8BAA8F4}" dt="2025-04-15T01:51:45.124" v="0" actId="313"/>
-          <ac:spMkLst>
-            <pc:docMk/>
-            <pc:sldMk cId="3865777220" sldId="614"/>
-            <ac:spMk id="8" creationId="{C258A7DE-EC58-F2C7-CF50-BDD348410213}"/>
-          </ac:spMkLst>
-        </pc:spChg>
-      </pc:sldChg>
-    </pc:docChg>
-  </pc:docChgLst>
-  <pc:docChgLst>
-    <pc:chgData name="Zhao Jin" userId="cd05a825-544c-438a-9ba1-08e63db50b47" providerId="ADAL" clId="{A4A0FEF4-5388-4642-A424-D6144C2A9D07}"/>
-    <pc:docChg chg="undo custSel modSld">
-      <pc:chgData name="Zhao Jin" userId="cd05a825-544c-438a-9ba1-08e63db50b47" providerId="ADAL" clId="{A4A0FEF4-5388-4642-A424-D6144C2A9D07}" dt="2021-01-25T03:36:28.487" v="214" actId="20577"/>
-      <pc:docMkLst>
-        <pc:docMk/>
-      </pc:docMkLst>
-      <pc:sldChg chg="delSp modSp">
-        <pc:chgData name="Zhao Jin" userId="cd05a825-544c-438a-9ba1-08e63db50b47" providerId="ADAL" clId="{A4A0FEF4-5388-4642-A424-D6144C2A9D07}" dt="2021-01-25T03:33:46.226" v="179"/>
-        <pc:sldMkLst>
-          <pc:docMk/>
-          <pc:sldMk cId="2543678377" sldId="531"/>
-        </pc:sldMkLst>
-      </pc:sldChg>
-      <pc:sldChg chg="delSp modSp">
-        <pc:chgData name="Zhao Jin" userId="cd05a825-544c-438a-9ba1-08e63db50b47" providerId="ADAL" clId="{A4A0FEF4-5388-4642-A424-D6144C2A9D07}" dt="2021-01-25T03:33:46.226" v="179"/>
-        <pc:sldMkLst>
-          <pc:docMk/>
-          <pc:sldMk cId="2025693378" sldId="532"/>
-        </pc:sldMkLst>
-      </pc:sldChg>
-      <pc:sldChg chg="delSp modSp">
-        <pc:chgData name="Zhao Jin" userId="cd05a825-544c-438a-9ba1-08e63db50b47" providerId="ADAL" clId="{A4A0FEF4-5388-4642-A424-D6144C2A9D07}" dt="2021-01-25T03:36:13.902" v="213" actId="403"/>
-        <pc:sldMkLst>
-          <pc:docMk/>
-          <pc:sldMk cId="266706937" sldId="533"/>
-        </pc:sldMkLst>
-      </pc:sldChg>
-      <pc:sldChg chg="addSp delSp modSp">
-        <pc:chgData name="Zhao Jin" userId="cd05a825-544c-438a-9ba1-08e63db50b47" providerId="ADAL" clId="{A4A0FEF4-5388-4642-A424-D6144C2A9D07}" dt="2021-01-25T03:36:28.487" v="214" actId="20577"/>
-        <pc:sldMkLst>
-          <pc:docMk/>
-          <pc:sldMk cId="3198948174" sldId="535"/>
-        </pc:sldMkLst>
-      </pc:sldChg>
-    </pc:docChg>
-  </pc:docChgLst>
-  <pc:docChgLst>
-    <pc:chgData name="Zhao Jin" userId="cd05a825-544c-438a-9ba1-08e63db50b47" providerId="ADAL" clId="{C328B041-D897-B548-9F0A-DA2B3CC3BF8E}"/>
-    <pc:docChg chg="undo custSel modSld">
-      <pc:chgData name="Zhao Jin" userId="cd05a825-544c-438a-9ba1-08e63db50b47" providerId="ADAL" clId="{C328B041-D897-B548-9F0A-DA2B3CC3BF8E}" dt="2021-03-08T02:30:29.708" v="502" actId="478"/>
-      <pc:docMkLst>
-        <pc:docMk/>
-      </pc:docMkLst>
-      <pc:sldChg chg="addSp delSp modSp">
-        <pc:chgData name="Zhao Jin" userId="cd05a825-544c-438a-9ba1-08e63db50b47" providerId="ADAL" clId="{C328B041-D897-B548-9F0A-DA2B3CC3BF8E}" dt="2021-03-08T01:59:34.595" v="472" actId="1076"/>
-        <pc:sldMkLst>
-          <pc:docMk/>
-          <pc:sldMk cId="640598186" sldId="606"/>
-        </pc:sldMkLst>
-      </pc:sldChg>
-      <pc:sldChg chg="addSp delSp modSp delAnim modAnim">
-        <pc:chgData name="Zhao Jin" userId="cd05a825-544c-438a-9ba1-08e63db50b47" providerId="ADAL" clId="{C328B041-D897-B548-9F0A-DA2B3CC3BF8E}" dt="2021-03-08T02:29:23.604" v="485"/>
-        <pc:sldMkLst>
-          <pc:docMk/>
-          <pc:sldMk cId="282410985" sldId="620"/>
-        </pc:sldMkLst>
-      </pc:sldChg>
-      <pc:sldChg chg="modAnim">
-        <pc:chgData name="Zhao Jin" userId="cd05a825-544c-438a-9ba1-08e63db50b47" providerId="ADAL" clId="{C328B041-D897-B548-9F0A-DA2B3CC3BF8E}" dt="2021-03-08T02:28:00.489" v="483"/>
-        <pc:sldMkLst>
-          <pc:docMk/>
-          <pc:sldMk cId="3503582036" sldId="622"/>
-        </pc:sldMkLst>
-      </pc:sldChg>
-      <pc:sldChg chg="delSp modSp modAnim">
-        <pc:chgData name="Zhao Jin" userId="cd05a825-544c-438a-9ba1-08e63db50b47" providerId="ADAL" clId="{C328B041-D897-B548-9F0A-DA2B3CC3BF8E}" dt="2021-03-08T02:30:29.708" v="502" actId="478"/>
-        <pc:sldMkLst>
-          <pc:docMk/>
-          <pc:sldMk cId="1258830549" sldId="635"/>
-        </pc:sldMkLst>
       </pc:sldChg>
     </pc:docChg>
   </pc:docChgLst>
@@ -1943,7 +786,7 @@
               <a:pPr>
                 <a:defRPr/>
               </a:pPr>
-              <a:t>4/15/2025</a:t>
+              <a:t>4/13/2026</a:t>
             </a:fld>
             <a:endParaRPr lang="en-US"/>
           </a:p>
@@ -11472,7 +10315,28 @@
             </a:pPr>
             <a:r>
               <a:rPr lang="en-US" sz="2800" dirty="0"/>
-              <a:t>Date: 29 Apr (Tuesday)</a:t>
+              <a:t>Date / Time</a:t>
+            </a:r>
+          </a:p>
+          <a:p>
+            <a:pPr marL="621983" lvl="1" indent="-347663">
+              <a:spcBef>
+                <a:spcPts val="600"/>
+              </a:spcBef>
+              <a:buClr>
+                <a:schemeClr val="tx1">
+                  <a:lumMod val="90000"/>
+                  <a:lumOff val="10000"/>
+                </a:schemeClr>
+              </a:buClr>
+              <a:buSzPct val="100000"/>
+              <a:buFont typeface="Wingdings" panose="05000000000000000000" pitchFamily="2" charset="2"/>
+              <a:buChar char="§"/>
+              <a:defRPr/>
+            </a:pPr>
+            <a:r>
+              <a:rPr lang="en-US" sz="2400" dirty="0"/>
+              <a:t>29 Apr (Wed), 9-11am</a:t>
             </a:r>
           </a:p>
           <a:p>
@@ -11491,10 +10355,7 @@
               <a:buChar char="§"/>
               <a:defRPr/>
             </a:pPr>
-            <a:r>
-              <a:rPr lang="en-US" sz="2800" dirty="0"/>
-              <a:t>Time: 5-7pm</a:t>
-            </a:r>
+            <a:endParaRPr lang="en-US" sz="2800" dirty="0"/>
           </a:p>
           <a:p>
             <a:pPr marL="347663" indent="-347663">
@@ -11512,6 +10373,47 @@
               <a:buChar char="§"/>
               <a:defRPr/>
             </a:pPr>
+            <a:r>
+              <a:rPr lang="en-US" sz="2800" dirty="0"/>
+              <a:t>Venue</a:t>
+            </a:r>
+          </a:p>
+          <a:p>
+            <a:pPr marL="621983" lvl="1" indent="-347663">
+              <a:spcBef>
+                <a:spcPts val="600"/>
+              </a:spcBef>
+              <a:buClr>
+                <a:schemeClr val="tx1">
+                  <a:lumMod val="90000"/>
+                  <a:lumOff val="10000"/>
+                </a:schemeClr>
+              </a:buClr>
+              <a:buSzPct val="100000"/>
+              <a:buFont typeface="Wingdings" panose="05000000000000000000" pitchFamily="2" charset="2"/>
+              <a:buChar char="§"/>
+              <a:defRPr/>
+            </a:pPr>
+            <a:r>
+              <a:rPr lang="en-US" altLang="zh-CN" sz="2400" dirty="0"/>
+              <a:t>SR2 (COM1-0204)</a:t>
+            </a:r>
+          </a:p>
+          <a:p>
+            <a:pPr marL="0" indent="0">
+              <a:spcBef>
+                <a:spcPts val="600"/>
+              </a:spcBef>
+              <a:buClr>
+                <a:schemeClr val="tx1">
+                  <a:lumMod val="90000"/>
+                  <a:lumOff val="10000"/>
+                </a:schemeClr>
+              </a:buClr>
+              <a:buSzPct val="100000"/>
+              <a:buNone/>
+              <a:defRPr/>
+            </a:pPr>
             <a:endParaRPr lang="en-US" sz="2800" dirty="0"/>
           </a:p>
           <a:p>
@@ -11532,71 +10434,7 @@
             </a:pPr>
             <a:r>
               <a:rPr lang="en-US" sz="2800" dirty="0"/>
-              <a:t>Format: F2f – Hardcopy (Pen and Paper)</a:t>
-            </a:r>
-          </a:p>
-          <a:p>
-            <a:pPr marL="347663" indent="-347663">
-              <a:spcBef>
-                <a:spcPts val="600"/>
-              </a:spcBef>
-              <a:buClr>
-                <a:schemeClr val="tx1">
-                  <a:lumMod val="90000"/>
-                  <a:lumOff val="10000"/>
-                </a:schemeClr>
-              </a:buClr>
-              <a:buSzPct val="100000"/>
-              <a:buFont typeface="Wingdings" panose="05000000000000000000" pitchFamily="2" charset="2"/>
-              <a:buChar char="§"/>
-              <a:defRPr/>
-            </a:pPr>
-            <a:r>
-              <a:rPr lang="en-US" sz="2800" dirty="0"/>
-              <a:t>Venue: </a:t>
-            </a:r>
-            <a:r>
-              <a:rPr lang="en-US" altLang="zh-CN" sz="2800" dirty="0"/>
-              <a:t>TBA</a:t>
-            </a:r>
-          </a:p>
-          <a:p>
-            <a:pPr marL="347663" indent="-347663">
-              <a:spcBef>
-                <a:spcPts val="600"/>
-              </a:spcBef>
-              <a:buClr>
-                <a:schemeClr val="tx1">
-                  <a:lumMod val="90000"/>
-                  <a:lumOff val="10000"/>
-                </a:schemeClr>
-              </a:buClr>
-              <a:buSzPct val="100000"/>
-              <a:buFont typeface="Wingdings" panose="05000000000000000000" pitchFamily="2" charset="2"/>
-              <a:buChar char="§"/>
-              <a:defRPr/>
-            </a:pPr>
-            <a:endParaRPr lang="en-US" sz="2800" dirty="0"/>
-          </a:p>
-          <a:p>
-            <a:pPr marL="347663" indent="-347663">
-              <a:spcBef>
-                <a:spcPts val="600"/>
-              </a:spcBef>
-              <a:buClr>
-                <a:schemeClr val="tx1">
-                  <a:lumMod val="90000"/>
-                  <a:lumOff val="10000"/>
-                </a:schemeClr>
-              </a:buClr>
-              <a:buSzPct val="100000"/>
-              <a:buFont typeface="Wingdings" panose="05000000000000000000" pitchFamily="2" charset="2"/>
-              <a:buChar char="§"/>
-              <a:defRPr/>
-            </a:pPr>
-            <a:r>
-              <a:rPr lang="en-US" sz="2800" dirty="0"/>
-              <a:t>Open Book</a:t>
+              <a:t>Format</a:t>
             </a:r>
           </a:p>
           <a:p>
@@ -11617,46 +10455,7 @@
             </a:pPr>
             <a:r>
               <a:rPr lang="en-US" sz="2400" dirty="0"/>
-              <a:t>But only printed/written materials allowed</a:t>
-            </a:r>
-          </a:p>
-          <a:p>
-            <a:pPr marL="347663" indent="-347663">
-              <a:spcBef>
-                <a:spcPts val="600"/>
-              </a:spcBef>
-              <a:buClr>
-                <a:schemeClr val="tx1">
-                  <a:lumMod val="90000"/>
-                  <a:lumOff val="10000"/>
-                </a:schemeClr>
-              </a:buClr>
-              <a:buSzPct val="100000"/>
-              <a:buFont typeface="Wingdings" panose="05000000000000000000" pitchFamily="2" charset="2"/>
-              <a:buChar char="§"/>
-              <a:defRPr/>
-            </a:pPr>
-            <a:endParaRPr lang="en-US" sz="2800" dirty="0"/>
-          </a:p>
-          <a:p>
-            <a:pPr marL="347663" indent="-347663">
-              <a:spcBef>
-                <a:spcPts val="600"/>
-              </a:spcBef>
-              <a:buClr>
-                <a:schemeClr val="tx1">
-                  <a:lumMod val="90000"/>
-                  <a:lumOff val="10000"/>
-                </a:schemeClr>
-              </a:buClr>
-              <a:buSzPct val="100000"/>
-              <a:buFont typeface="Wingdings" panose="05000000000000000000" pitchFamily="2" charset="2"/>
-              <a:buChar char="§"/>
-              <a:defRPr/>
-            </a:pPr>
-            <a:r>
-              <a:rPr lang="en-US" sz="2800" dirty="0"/>
-              <a:t>Calculators allowed</a:t>
+              <a:t>Pen and Paper</a:t>
             </a:r>
           </a:p>
           <a:p>
@@ -11677,8 +10476,55 @@
             </a:pPr>
             <a:r>
               <a:rPr lang="en-US" sz="2400" dirty="0"/>
-              <a:t>Although you do not need one</a:t>
-            </a:r>
+              <a:t>Open book (only printed/written materials allowed)</a:t>
+            </a:r>
+          </a:p>
+          <a:p>
+            <a:pPr marL="621983" lvl="1" indent="-347663">
+              <a:spcBef>
+                <a:spcPts val="600"/>
+              </a:spcBef>
+              <a:buClr>
+                <a:schemeClr val="tx1">
+                  <a:lumMod val="90000"/>
+                  <a:lumOff val="10000"/>
+                </a:schemeClr>
+              </a:buClr>
+              <a:buSzPct val="100000"/>
+              <a:buFont typeface="Wingdings" panose="05000000000000000000" pitchFamily="2" charset="2"/>
+              <a:buChar char="§"/>
+              <a:defRPr/>
+            </a:pPr>
+            <a:r>
+              <a:rPr lang="en-US" sz="2400" dirty="0"/>
+              <a:t>Calculators allowed</a:t>
+            </a:r>
+          </a:p>
+          <a:p>
+            <a:pPr marL="621983" lvl="1" indent="-347663">
+              <a:spcBef>
+                <a:spcPts val="600"/>
+              </a:spcBef>
+              <a:buClr>
+                <a:schemeClr val="tx1">
+                  <a:lumMod val="90000"/>
+                  <a:lumOff val="10000"/>
+                </a:schemeClr>
+              </a:buClr>
+              <a:buSzPct val="100000"/>
+              <a:buFont typeface="Wingdings" panose="05000000000000000000" pitchFamily="2" charset="2"/>
+              <a:buChar char="§"/>
+              <a:defRPr/>
+            </a:pPr>
+            <a:r>
+              <a:rPr lang="en-US" sz="2400" dirty="0"/>
+              <a:t>C libraries not allowed </a:t>
+            </a:r>
+            <a:r>
+              <a:rPr lang="en-US" sz="2400"/>
+              <a:t>in general</a:t>
+            </a:r>
+            <a:endParaRPr lang="en-US" sz="2800" dirty="0"/>
           </a:p>
         </p:txBody>
       </p:sp>
@@ -11818,7 +10664,7 @@
             </a:pPr>
             <a:r>
               <a:rPr lang="en-US" sz="2800" dirty="0"/>
-              <a:t>Scope:</a:t>
+              <a:t>Scope</a:t>
             </a:r>
           </a:p>
           <a:p>
@@ -11839,7 +10685,7 @@
             </a:pPr>
             <a:r>
               <a:rPr lang="en-US" sz="2400" dirty="0"/>
-              <a:t>Everything covered in the lectures, labs and course materials.</a:t>
+              <a:t>Everything covered in the course</a:t>
             </a:r>
           </a:p>
           <a:p>
@@ -11878,7 +10724,7 @@
             </a:pPr>
             <a:r>
               <a:rPr lang="en-US" sz="2800" dirty="0"/>
-              <a:t>Format:</a:t>
+              <a:t>Structure</a:t>
             </a:r>
           </a:p>
           <a:p>
@@ -12140,7 +10986,10 @@
               <a:buChar char="§"/>
               <a:defRPr/>
             </a:pPr>
-            <a:endParaRPr lang="en-US" sz="2400" dirty="0"/>
+            <a:r>
+              <a:rPr lang="en-US" sz="2400" dirty="0"/>
+              <a:t>Logical Thinking</a:t>
+            </a:r>
           </a:p>
           <a:p>
             <a:pPr marL="621983" lvl="1" indent="-347663">
@@ -12160,7 +11009,7 @@
             </a:pPr>
             <a:r>
               <a:rPr lang="en-US" sz="2400" dirty="0"/>
-              <a:t>Logical Thinking</a:t>
+              <a:t>Basic Syntax</a:t>
             </a:r>
           </a:p>
           <a:p>
@@ -12179,7 +11028,10 @@
               <a:buChar char="§"/>
               <a:defRPr/>
             </a:pPr>
-            <a:endParaRPr lang="en-US" sz="2400" dirty="0"/>
+            <a:r>
+              <a:rPr lang="en-US" sz="2400" dirty="0"/>
+              <a:t>Tracing</a:t>
+            </a:r>
           </a:p>
           <a:p>
             <a:pPr marL="621983" lvl="1" indent="-347663">
@@ -12199,7 +11051,7 @@
             </a:pPr>
             <a:r>
               <a:rPr lang="en-US" sz="2400" dirty="0"/>
-              <a:t>Basic Syntax</a:t>
+              <a:t>Time Complexity</a:t>
             </a:r>
           </a:p>
           <a:p>
@@ -12218,27 +11070,9 @@
               <a:buChar char="§"/>
               <a:defRPr/>
             </a:pPr>
-            <a:endParaRPr lang="en-US" sz="2400" dirty="0"/>
-          </a:p>
-          <a:p>
-            <a:pPr marL="621983" lvl="1" indent="-347663">
-              <a:spcBef>
-                <a:spcPts val="600"/>
-              </a:spcBef>
-              <a:buClr>
-                <a:schemeClr val="tx1">
-                  <a:lumMod val="90000"/>
-                  <a:lumOff val="10000"/>
-                </a:schemeClr>
-              </a:buClr>
-              <a:buSzPct val="100000"/>
-              <a:buFont typeface="Wingdings" panose="05000000000000000000" pitchFamily="2" charset="2"/>
-              <a:buChar char="§"/>
-              <a:defRPr/>
-            </a:pPr>
             <a:r>
               <a:rPr lang="en-US" sz="2400" dirty="0"/>
-              <a:t>Tracing</a:t>
+              <a:t>…</a:t>
             </a:r>
           </a:p>
           <a:p>
@@ -12455,7 +11289,10 @@
               <a:buChar char="§"/>
               <a:defRPr/>
             </a:pPr>
-            <a:endParaRPr lang="en-US" sz="2400" dirty="0"/>
+            <a:r>
+              <a:rPr lang="en-US" sz="2400" dirty="0"/>
+              <a:t>Logical Thinking</a:t>
+            </a:r>
           </a:p>
           <a:p>
             <a:pPr marL="621983" lvl="1" indent="-347663">
@@ -12475,7 +11312,7 @@
             </a:pPr>
             <a:r>
               <a:rPr lang="en-US" sz="2400" dirty="0"/>
-              <a:t>Logical Thinking</a:t>
+              <a:t>Assertion / Loop Invariant</a:t>
             </a:r>
           </a:p>
           <a:p>
@@ -12494,7 +11331,10 @@
               <a:buChar char="§"/>
               <a:defRPr/>
             </a:pPr>
-            <a:endParaRPr lang="en-US" sz="2400" dirty="0"/>
+            <a:r>
+              <a:rPr lang="en-US" sz="2400" dirty="0"/>
+              <a:t>Computer Memory</a:t>
+            </a:r>
           </a:p>
           <a:p>
             <a:pPr marL="621983" lvl="1" indent="-347663">
@@ -12514,8 +11354,26 @@
             </a:pPr>
             <a:r>
               <a:rPr lang="en-US" sz="2400" dirty="0"/>
-              <a:t>Assertion / Loop Invariant</a:t>
-            </a:r>
+              <a:t>…</a:t>
+            </a:r>
+          </a:p>
+          <a:p>
+            <a:pPr marL="621983" lvl="1" indent="-347663">
+              <a:spcBef>
+                <a:spcPts val="600"/>
+              </a:spcBef>
+              <a:buClr>
+                <a:schemeClr val="tx1">
+                  <a:lumMod val="90000"/>
+                  <a:lumOff val="10000"/>
+                </a:schemeClr>
+              </a:buClr>
+              <a:buSzPct val="100000"/>
+              <a:buFont typeface="Wingdings" panose="05000000000000000000" pitchFamily="2" charset="2"/>
+              <a:buChar char="§"/>
+              <a:defRPr/>
+            </a:pPr>
+            <a:endParaRPr lang="en-US" sz="2400" dirty="0"/>
           </a:p>
           <a:p>
             <a:pPr marL="621983" lvl="1" indent="-347663">
@@ -12797,7 +11655,7 @@
             </a:pPr>
             <a:r>
               <a:rPr lang="en-US" sz="2400" dirty="0"/>
-              <a:t>Tracing</a:t>
+              <a:t>Time Complexity</a:t>
             </a:r>
           </a:p>
           <a:p>
@@ -12818,7 +11676,7 @@
             </a:pPr>
             <a:r>
               <a:rPr lang="en-US" sz="2400" dirty="0"/>
-              <a:t>Memory Management </a:t>
+              <a:t>Tracing</a:t>
             </a:r>
           </a:p>
           <a:p>
@@ -12839,8 +11697,26 @@
             </a:pPr>
             <a:r>
               <a:rPr lang="en-US" sz="2400" dirty="0"/>
-              <a:t>Time Complexity</a:t>
-            </a:r>
+              <a:t>…</a:t>
+            </a:r>
+          </a:p>
+          <a:p>
+            <a:pPr marL="621983" lvl="1" indent="-347663">
+              <a:spcBef>
+                <a:spcPts val="600"/>
+              </a:spcBef>
+              <a:buClr>
+                <a:schemeClr val="tx1">
+                  <a:lumMod val="90000"/>
+                  <a:lumOff val="10000"/>
+                </a:schemeClr>
+              </a:buClr>
+              <a:buSzPct val="100000"/>
+              <a:buFont typeface="Wingdings" panose="05000000000000000000" pitchFamily="2" charset="2"/>
+              <a:buChar char="§"/>
+              <a:defRPr/>
+            </a:pPr>
+            <a:endParaRPr lang="en-US" sz="2400" dirty="0"/>
           </a:p>
           <a:p>
             <a:pPr marL="621983" lvl="1" indent="-347663">
@@ -13016,7 +11892,28 @@
             </a:pPr>
             <a:r>
               <a:rPr lang="en-US" sz="2800" dirty="0"/>
-              <a:t>25 April (Fri), 10am-12nn</a:t>
+              <a:t>Date/Time</a:t>
+            </a:r>
+          </a:p>
+          <a:p>
+            <a:pPr marL="621983" lvl="1" indent="-347663">
+              <a:spcBef>
+                <a:spcPts val="600"/>
+              </a:spcBef>
+              <a:buClr>
+                <a:schemeClr val="tx1">
+                  <a:lumMod val="90000"/>
+                  <a:lumOff val="10000"/>
+                </a:schemeClr>
+              </a:buClr>
+              <a:buSzPct val="100000"/>
+              <a:buFont typeface="Wingdings" panose="05000000000000000000" pitchFamily="2" charset="2"/>
+              <a:buChar char="§"/>
+              <a:defRPr/>
+            </a:pPr>
+            <a:r>
+              <a:rPr lang="en-US" sz="2400" dirty="0"/>
+              <a:t>23 Apr (Thu), 12-2pm</a:t>
             </a:r>
           </a:p>
           <a:p>
@@ -13035,9 +11932,27 @@
               <a:buChar char="§"/>
               <a:defRPr/>
             </a:pPr>
+            <a:endParaRPr lang="en-US" sz="2800" dirty="0"/>
+          </a:p>
+          <a:p>
+            <a:pPr marL="347663" indent="-347663">
+              <a:spcBef>
+                <a:spcPts val="600"/>
+              </a:spcBef>
+              <a:buClr>
+                <a:schemeClr val="tx1">
+                  <a:lumMod val="90000"/>
+                  <a:lumOff val="10000"/>
+                </a:schemeClr>
+              </a:buClr>
+              <a:buSzPct val="100000"/>
+              <a:buFont typeface="Wingdings" panose="05000000000000000000" pitchFamily="2" charset="2"/>
+              <a:buChar char="§"/>
+              <a:defRPr/>
+            </a:pPr>
             <a:r>
               <a:rPr lang="en-US" sz="2800" dirty="0"/>
-              <a:t>Online via Zoom</a:t>
+              <a:t>Content</a:t>
             </a:r>
           </a:p>
           <a:p>
@@ -13056,6 +11971,27 @@
               <a:buChar char="§"/>
               <a:defRPr/>
             </a:pPr>
+            <a:r>
+              <a:rPr lang="en-US" sz="2400" dirty="0"/>
+              <a:t>Past year paper (24/25 Sem 2) + Q&amp;A</a:t>
+            </a:r>
+          </a:p>
+          <a:p>
+            <a:pPr marL="621983" lvl="1" indent="-347663">
+              <a:spcBef>
+                <a:spcPts val="600"/>
+              </a:spcBef>
+              <a:buClr>
+                <a:schemeClr val="tx1">
+                  <a:lumMod val="90000"/>
+                  <a:lumOff val="10000"/>
+                </a:schemeClr>
+              </a:buClr>
+              <a:buSzPct val="100000"/>
+              <a:buFont typeface="Wingdings" panose="05000000000000000000" pitchFamily="2" charset="2"/>
+              <a:buChar char="§"/>
+              <a:defRPr/>
+            </a:pPr>
             <a:endParaRPr lang="en-US" sz="2400" dirty="0"/>
           </a:p>
           <a:p>
@@ -13076,7 +12012,88 @@
             </a:pPr>
             <a:r>
               <a:rPr lang="en-US" sz="2800" dirty="0"/>
-              <a:t>Past year paper (23/24 Sem 2) + Q&amp;A</a:t>
+              <a:t>Format</a:t>
+            </a:r>
+          </a:p>
+          <a:p>
+            <a:pPr marL="621983" lvl="1" indent="-347663">
+              <a:spcBef>
+                <a:spcPts val="600"/>
+              </a:spcBef>
+              <a:buClr>
+                <a:schemeClr val="tx1">
+                  <a:lumMod val="90000"/>
+                  <a:lumOff val="10000"/>
+                </a:schemeClr>
+              </a:buClr>
+              <a:buSzPct val="100000"/>
+              <a:buFont typeface="Wingdings" panose="05000000000000000000" pitchFamily="2" charset="2"/>
+              <a:buChar char="§"/>
+              <a:defRPr/>
+            </a:pPr>
+            <a:r>
+              <a:rPr lang="en-US" sz="2400" dirty="0"/>
+              <a:t>Online via Zoom</a:t>
+            </a:r>
+          </a:p>
+          <a:p>
+            <a:pPr marL="621983" lvl="1" indent="-347663">
+              <a:spcBef>
+                <a:spcPts val="600"/>
+              </a:spcBef>
+              <a:buClr>
+                <a:schemeClr val="tx1">
+                  <a:lumMod val="90000"/>
+                  <a:lumOff val="10000"/>
+                </a:schemeClr>
+              </a:buClr>
+              <a:buSzPct val="100000"/>
+              <a:buFont typeface="Wingdings" panose="05000000000000000000" pitchFamily="2" charset="2"/>
+              <a:buChar char="§"/>
+              <a:defRPr/>
+            </a:pPr>
+            <a:r>
+              <a:rPr lang="en-US" sz="2400" dirty="0"/>
+              <a:t>Recorded on a best-effort basis</a:t>
+            </a:r>
+          </a:p>
+          <a:p>
+            <a:pPr marL="621983" lvl="1" indent="-347663">
+              <a:spcBef>
+                <a:spcPts val="600"/>
+              </a:spcBef>
+              <a:buClr>
+                <a:schemeClr val="tx1">
+                  <a:lumMod val="90000"/>
+                  <a:lumOff val="10000"/>
+                </a:schemeClr>
+              </a:buClr>
+              <a:buSzPct val="100000"/>
+              <a:buFont typeface="Wingdings" panose="05000000000000000000" pitchFamily="2" charset="2"/>
+              <a:buChar char="§"/>
+              <a:defRPr/>
+            </a:pPr>
+            <a:endParaRPr lang="en-US" sz="2400" dirty="0"/>
+          </a:p>
+          <a:p>
+            <a:pPr marL="347663" indent="-347663">
+              <a:spcBef>
+                <a:spcPts val="600"/>
+              </a:spcBef>
+              <a:buClr>
+                <a:schemeClr val="tx1">
+                  <a:lumMod val="90000"/>
+                  <a:lumOff val="10000"/>
+                </a:schemeClr>
+              </a:buClr>
+              <a:buSzPct val="100000"/>
+              <a:buFont typeface="Wingdings" panose="05000000000000000000" pitchFamily="2" charset="2"/>
+              <a:buChar char="§"/>
+              <a:defRPr/>
+            </a:pPr>
+            <a:r>
+              <a:rPr lang="en-US" sz="2800" dirty="0"/>
+              <a:t>Zoom Link to be released in Canvas Zoom</a:t>
             </a:r>
           </a:p>
           <a:p>
@@ -13288,8 +12305,47 @@
             </a:pPr>
             <a:r>
               <a:rPr lang="en-US" sz="2800" dirty="0"/>
-              <a:t>25/28 April (Fri/Mon), 12nn-5pm</a:t>
-            </a:r>
+              <a:t>Date / Time</a:t>
+            </a:r>
+          </a:p>
+          <a:p>
+            <a:pPr marL="621983" lvl="1" indent="-347663">
+              <a:spcBef>
+                <a:spcPts val="600"/>
+              </a:spcBef>
+              <a:buClr>
+                <a:schemeClr val="tx1">
+                  <a:lumMod val="90000"/>
+                  <a:lumOff val="10000"/>
+                </a:schemeClr>
+              </a:buClr>
+              <a:buSzPct val="100000"/>
+              <a:buFont typeface="Wingdings" panose="05000000000000000000" pitchFamily="2" charset="2"/>
+              <a:buChar char="§"/>
+              <a:defRPr/>
+            </a:pPr>
+            <a:r>
+              <a:rPr lang="en-US" sz="2400" dirty="0"/>
+              <a:t>16/20/23 Apr (Thu/Mon/Thu), 4-6pm</a:t>
+            </a:r>
+          </a:p>
+          <a:p>
+            <a:pPr marL="621983" lvl="1" indent="-347663">
+              <a:spcBef>
+                <a:spcPts val="600"/>
+              </a:spcBef>
+              <a:buClr>
+                <a:schemeClr val="tx1">
+                  <a:lumMod val="90000"/>
+                  <a:lumOff val="10000"/>
+                </a:schemeClr>
+              </a:buClr>
+              <a:buSzPct val="100000"/>
+              <a:buFont typeface="Wingdings" panose="05000000000000000000" pitchFamily="2" charset="2"/>
+              <a:buChar char="§"/>
+              <a:defRPr/>
+            </a:pPr>
+            <a:endParaRPr lang="en-US" sz="2400" dirty="0"/>
           </a:p>
           <a:p>
             <a:pPr marL="347663" indent="-347663">
@@ -13309,7 +12365,61 @@
             </a:pPr>
             <a:r>
               <a:rPr lang="en-US" sz="2800" dirty="0"/>
-              <a:t>COM2-02-10</a:t>
+              <a:t>Format</a:t>
+            </a:r>
+          </a:p>
+          <a:p>
+            <a:pPr marL="621983" lvl="1" indent="-347663">
+              <a:spcBef>
+                <a:spcPts val="600"/>
+              </a:spcBef>
+              <a:buClr>
+                <a:schemeClr val="tx1">
+                  <a:lumMod val="90000"/>
+                  <a:lumOff val="10000"/>
+                </a:schemeClr>
+              </a:buClr>
+              <a:buSzPct val="100000"/>
+              <a:buFont typeface="Wingdings" panose="05000000000000000000" pitchFamily="2" charset="2"/>
+              <a:buChar char="§"/>
+              <a:defRPr/>
+            </a:pPr>
+            <a:r>
+              <a:rPr lang="en-US" sz="2400" dirty="0"/>
+              <a:t>30 minutes per session</a:t>
+            </a:r>
+          </a:p>
+          <a:p>
+            <a:pPr marL="621983" lvl="1" indent="-347663">
+              <a:spcBef>
+                <a:spcPts val="600"/>
+              </a:spcBef>
+              <a:buClr>
+                <a:schemeClr val="tx1">
+                  <a:lumMod val="90000"/>
+                  <a:lumOff val="10000"/>
+                </a:schemeClr>
+              </a:buClr>
+              <a:buSzPct val="100000"/>
+              <a:buFont typeface="Wingdings" panose="05000000000000000000" pitchFamily="2" charset="2"/>
+              <a:buChar char="§"/>
+              <a:defRPr/>
+            </a:pPr>
+            <a:r>
+              <a:rPr lang="en-US" sz="2400" b="1" dirty="0"/>
+              <a:t>Online</a:t>
+            </a:r>
+            <a:r>
+              <a:rPr lang="en-US" sz="2400" dirty="0"/>
+              <a:t> (via Zoom) or </a:t>
+            </a:r>
+            <a:r>
+              <a:rPr lang="en-US" sz="2400" b="1" dirty="0"/>
+              <a:t>Physical</a:t>
+            </a:r>
+            <a:r>
+              <a:rPr lang="en-US" sz="2400" dirty="0"/>
+              <a:t> (at COM-02-10)</a:t>
             </a:r>
           </a:p>
           <a:p>
@@ -13348,8 +12458,65 @@
             </a:pPr>
             <a:r>
               <a:rPr lang="en-US" sz="2800" dirty="0"/>
-              <a:t>Sign-up link in Canvas Announcement</a:t>
-            </a:r>
+              <a:t>Signup link to be released in Canvas Announcement</a:t>
+            </a:r>
+          </a:p>
+          <a:p>
+            <a:pPr marL="621983" lvl="1" indent="-347663">
+              <a:spcBef>
+                <a:spcPts val="600"/>
+              </a:spcBef>
+              <a:buClr>
+                <a:schemeClr val="tx1">
+                  <a:lumMod val="90000"/>
+                  <a:lumOff val="10000"/>
+                </a:schemeClr>
+              </a:buClr>
+              <a:buSzPct val="100000"/>
+              <a:buFont typeface="Wingdings" panose="05000000000000000000" pitchFamily="2" charset="2"/>
+              <a:buChar char="§"/>
+              <a:defRPr/>
+            </a:pPr>
+            <a:r>
+              <a:rPr lang="en-US" sz="2400" dirty="0"/>
+              <a:t>Indicate format when you sign up, e.g., Alex (Online)</a:t>
+            </a:r>
+          </a:p>
+          <a:p>
+            <a:pPr marL="347663" indent="-347663">
+              <a:spcBef>
+                <a:spcPts val="600"/>
+              </a:spcBef>
+              <a:buClr>
+                <a:schemeClr val="tx1">
+                  <a:lumMod val="90000"/>
+                  <a:lumOff val="10000"/>
+                </a:schemeClr>
+              </a:buClr>
+              <a:buSzPct val="100000"/>
+              <a:buFont typeface="Wingdings" panose="05000000000000000000" pitchFamily="2" charset="2"/>
+              <a:buChar char="§"/>
+              <a:defRPr/>
+            </a:pPr>
+            <a:endParaRPr lang="en-US" sz="2800" dirty="0"/>
+          </a:p>
+          <a:p>
+            <a:pPr marL="347663" indent="-347663">
+              <a:spcBef>
+                <a:spcPts val="600"/>
+              </a:spcBef>
+              <a:buClr>
+                <a:schemeClr val="tx1">
+                  <a:lumMod val="90000"/>
+                  <a:lumOff val="10000"/>
+                </a:schemeClr>
+              </a:buClr>
+              <a:buSzPct val="100000"/>
+              <a:buFont typeface="Wingdings" panose="05000000000000000000" pitchFamily="2" charset="2"/>
+              <a:buChar char="§"/>
+              <a:defRPr/>
+            </a:pPr>
+            <a:endParaRPr lang="en-US" sz="2800" dirty="0"/>
           </a:p>
           <a:p>
             <a:pPr marL="621983" lvl="1" indent="-347663">
